--- a/docs/PR/LT/HomePage_開発者用.pptx
+++ b/docs/PR/LT/HomePage_開発者用.pptx
@@ -5,7 +5,7 @@
     <p:sldMasterId id="2147483648" r:id="rId1"/>
   </p:sldMasterIdLst>
   <p:notesMasterIdLst>
-    <p:notesMasterId r:id="rId11"/>
+    <p:notesMasterId r:id="rId12"/>
   </p:notesMasterIdLst>
   <p:sldIdLst>
     <p:sldId id="256" r:id="rId2"/>
@@ -17,6 +17,7 @@
     <p:sldId id="269" r:id="rId8"/>
     <p:sldId id="270" r:id="rId9"/>
     <p:sldId id="271" r:id="rId10"/>
+    <p:sldId id="273" r:id="rId11"/>
   </p:sldIdLst>
   <p:sldSz cx="12192000" cy="6858000"/>
   <p:notesSz cx="6858000" cy="9144000"/>
@@ -216,7 +217,7 @@
           <a:p>
             <a:fld id="{B5390508-11FE-4107-B12B-FCBF7DE7140E}" type="datetimeFigureOut">
               <a:rPr kumimoji="1" lang="ja-JP" altLang="en-US" smtClean="0"/>
-              <a:t>2026/4/8</a:t>
+              <a:t>2026/4/10</a:t>
             </a:fld>
             <a:endParaRPr kumimoji="1" lang="ja-JP" altLang="en-US"/>
           </a:p>
@@ -2267,6 +2268,90 @@
 </p:notes>
 </file>
 
+<file path=ppt/notesSlides/notesSlide2.xml><?xml version="1.0" encoding="utf-8"?>
+<p:notes xmlns:a="http://schemas.openxmlformats.org/drawingml/2006/main" xmlns:r="http://schemas.openxmlformats.org/officeDocument/2006/relationships" xmlns:p="http://schemas.openxmlformats.org/presentationml/2006/main">
+  <p:cSld>
+    <p:spTree>
+      <p:nvGrpSpPr>
+        <p:cNvPr id="1" name=""/>
+        <p:cNvGrpSpPr/>
+        <p:nvPr/>
+      </p:nvGrpSpPr>
+      <p:grpSpPr>
+        <a:xfrm>
+          <a:off x="0" y="0"/>
+          <a:ext cx="0" cy="0"/>
+          <a:chOff x="0" y="0"/>
+          <a:chExt cx="0" cy="0"/>
+        </a:xfrm>
+      </p:grpSpPr>
+      <p:sp>
+        <p:nvSpPr>
+          <p:cNvPr id="2" name="スライド イメージ プレースホルダー 1"/>
+          <p:cNvSpPr>
+            <a:spLocks noGrp="1" noRot="1" noChangeAspect="1"/>
+          </p:cNvSpPr>
+          <p:nvPr>
+            <p:ph type="sldImg"/>
+          </p:nvPr>
+        </p:nvSpPr>
+        <p:spPr/>
+      </p:sp>
+      <p:sp>
+        <p:nvSpPr>
+          <p:cNvPr id="3" name="ノート プレースホルダー 2"/>
+          <p:cNvSpPr>
+            <a:spLocks noGrp="1"/>
+          </p:cNvSpPr>
+          <p:nvPr>
+            <p:ph type="body" idx="1"/>
+          </p:nvPr>
+        </p:nvSpPr>
+        <p:spPr/>
+        <p:txBody>
+          <a:bodyPr/>
+          <a:lstStyle/>
+          <a:p>
+            <a:endParaRPr kumimoji="1" lang="ja-JP" altLang="en-US" dirty="0"/>
+          </a:p>
+        </p:txBody>
+      </p:sp>
+      <p:sp>
+        <p:nvSpPr>
+          <p:cNvPr id="4" name="スライド番号プレースホルダー 3"/>
+          <p:cNvSpPr>
+            <a:spLocks noGrp="1"/>
+          </p:cNvSpPr>
+          <p:nvPr>
+            <p:ph type="sldNum" sz="quarter" idx="5"/>
+          </p:nvPr>
+        </p:nvSpPr>
+        <p:spPr/>
+        <p:txBody>
+          <a:bodyPr/>
+          <a:lstStyle/>
+          <a:p>
+            <a:fld id="{FE40D1D6-3BC6-4DF1-B693-2708FA121648}" type="slidenum">
+              <a:rPr kumimoji="1" lang="ja-JP" altLang="en-US" smtClean="0"/>
+              <a:t>8</a:t>
+            </a:fld>
+            <a:endParaRPr kumimoji="1" lang="ja-JP" altLang="en-US"/>
+          </a:p>
+        </p:txBody>
+      </p:sp>
+    </p:spTree>
+    <p:extLst>
+      <p:ext uri="{BB962C8B-B14F-4D97-AF65-F5344CB8AC3E}">
+        <p14:creationId xmlns:p14="http://schemas.microsoft.com/office/powerpoint/2010/main" val="277506193"/>
+      </p:ext>
+    </p:extLst>
+  </p:cSld>
+  <p:clrMapOvr>
+    <a:masterClrMapping/>
+  </p:clrMapOvr>
+</p:notes>
+</file>
+
 <file path=ppt/slideLayouts/slideLayout1.xml><?xml version="1.0" encoding="utf-8"?>
 <p:sldLayout xmlns:a="http://schemas.openxmlformats.org/drawingml/2006/main" xmlns:r="http://schemas.openxmlformats.org/officeDocument/2006/relationships" xmlns:p="http://schemas.openxmlformats.org/presentationml/2006/main" type="title" preserve="1">
   <p:cSld name="Title Slide">
@@ -2446,7 +2531,7 @@
           <a:p>
             <a:fld id="{5BCAD085-E8A6-8845-BD4E-CB4CCA059FC4}" type="datetimeFigureOut">
               <a:rPr lang="en-US" smtClean="0"/>
-              <a:t>4/8/2026</a:t>
+              <a:t>4/10/2026</a:t>
             </a:fld>
             <a:endParaRPr lang="en-US"/>
           </a:p>
@@ -2614,7 +2699,7 @@
           <a:p>
             <a:fld id="{5BCAD085-E8A6-8845-BD4E-CB4CCA059FC4}" type="datetimeFigureOut">
               <a:rPr lang="en-US" smtClean="0"/>
-              <a:t>4/8/2026</a:t>
+              <a:t>4/10/2026</a:t>
             </a:fld>
             <a:endParaRPr lang="en-US"/>
           </a:p>
@@ -2792,7 +2877,7 @@
           <a:p>
             <a:fld id="{5BCAD085-E8A6-8845-BD4E-CB4CCA059FC4}" type="datetimeFigureOut">
               <a:rPr lang="en-US" smtClean="0"/>
-              <a:t>4/8/2026</a:t>
+              <a:t>4/10/2026</a:t>
             </a:fld>
             <a:endParaRPr lang="en-US"/>
           </a:p>
@@ -2960,7 +3045,7 @@
           <a:p>
             <a:fld id="{5BCAD085-E8A6-8845-BD4E-CB4CCA059FC4}" type="datetimeFigureOut">
               <a:rPr lang="en-US" smtClean="0"/>
-              <a:t>4/8/2026</a:t>
+              <a:t>4/10/2026</a:t>
             </a:fld>
             <a:endParaRPr lang="en-US"/>
           </a:p>
@@ -3205,7 +3290,7 @@
           <a:p>
             <a:fld id="{5BCAD085-E8A6-8845-BD4E-CB4CCA059FC4}" type="datetimeFigureOut">
               <a:rPr lang="en-US" smtClean="0"/>
-              <a:t>4/8/2026</a:t>
+              <a:t>4/10/2026</a:t>
             </a:fld>
             <a:endParaRPr lang="en-US"/>
           </a:p>
@@ -3490,7 +3575,7 @@
           <a:p>
             <a:fld id="{5BCAD085-E8A6-8845-BD4E-CB4CCA059FC4}" type="datetimeFigureOut">
               <a:rPr lang="en-US" smtClean="0"/>
-              <a:t>4/8/2026</a:t>
+              <a:t>4/10/2026</a:t>
             </a:fld>
             <a:endParaRPr lang="en-US"/>
           </a:p>
@@ -3909,7 +3994,7 @@
           <a:p>
             <a:fld id="{5BCAD085-E8A6-8845-BD4E-CB4CCA059FC4}" type="datetimeFigureOut">
               <a:rPr lang="en-US" smtClean="0"/>
-              <a:t>4/8/2026</a:t>
+              <a:t>4/10/2026</a:t>
             </a:fld>
             <a:endParaRPr lang="en-US"/>
           </a:p>
@@ -4026,7 +4111,7 @@
           <a:p>
             <a:fld id="{5BCAD085-E8A6-8845-BD4E-CB4CCA059FC4}" type="datetimeFigureOut">
               <a:rPr lang="en-US" smtClean="0"/>
-              <a:t>4/8/2026</a:t>
+              <a:t>4/10/2026</a:t>
             </a:fld>
             <a:endParaRPr lang="en-US"/>
           </a:p>
@@ -4121,7 +4206,7 @@
           <a:p>
             <a:fld id="{5BCAD085-E8A6-8845-BD4E-CB4CCA059FC4}" type="datetimeFigureOut">
               <a:rPr lang="en-US" smtClean="0"/>
-              <a:t>4/8/2026</a:t>
+              <a:t>4/10/2026</a:t>
             </a:fld>
             <a:endParaRPr lang="en-US"/>
           </a:p>
@@ -4396,7 +4481,7 @@
           <a:p>
             <a:fld id="{5BCAD085-E8A6-8845-BD4E-CB4CCA059FC4}" type="datetimeFigureOut">
               <a:rPr lang="en-US" smtClean="0"/>
-              <a:t>4/8/2026</a:t>
+              <a:t>4/10/2026</a:t>
             </a:fld>
             <a:endParaRPr lang="en-US"/>
           </a:p>
@@ -4648,7 +4733,7 @@
           <a:p>
             <a:fld id="{5BCAD085-E8A6-8845-BD4E-CB4CCA059FC4}" type="datetimeFigureOut">
               <a:rPr lang="en-US" smtClean="0"/>
-              <a:t>4/8/2026</a:t>
+              <a:t>4/10/2026</a:t>
             </a:fld>
             <a:endParaRPr lang="en-US"/>
           </a:p>
@@ -4859,7 +4944,7 @@
           <a:p>
             <a:fld id="{5BCAD085-E8A6-8845-BD4E-CB4CCA059FC4}" type="datetimeFigureOut">
               <a:rPr lang="en-US" smtClean="0"/>
-              <a:t>4/8/2026</a:t>
+              <a:t>4/10/2026</a:t>
             </a:fld>
             <a:endParaRPr lang="en-US"/>
           </a:p>
@@ -5250,7 +5335,7 @@
         </p:nvSpPr>
         <p:spPr>
           <a:xfrm>
-            <a:off x="800000" y="1500000"/>
+            <a:off x="800000" y="2105561"/>
             <a:ext cx="10591695" cy="1323439"/>
           </a:xfrm>
           <a:prstGeom prst="rect">
@@ -5288,58 +5373,6 @@
             <a:r>
               <a:rPr sz="4000" dirty="0"/>
               <a:t>5日間でホームページを作った話</a:t>
-            </a:r>
-          </a:p>
-        </p:txBody>
-      </p:sp>
-      <p:sp>
-        <p:nvSpPr>
-          <p:cNvPr id="3" name="TextBox 2"/>
-          <p:cNvSpPr txBox="1"/>
-          <p:nvPr/>
-        </p:nvSpPr>
-        <p:spPr>
-          <a:xfrm>
-            <a:off x="800000" y="2800000"/>
-            <a:ext cx="10591695" cy="523220"/>
-          </a:xfrm>
-          <a:prstGeom prst="rect">
-            <a:avLst/>
-          </a:prstGeom>
-          <a:noFill/>
-        </p:spPr>
-        <p:txBody>
-          <a:bodyPr wrap="square">
-            <a:spAutoFit/>
-          </a:bodyPr>
-          <a:lstStyle/>
-          <a:p>
-            <a:pPr algn="ctr">
-              <a:defRPr sz="2000" b="0">
-                <a:solidFill>
-                  <a:srgbClr val="A78BFA"/>
-                </a:solidFill>
-              </a:defRPr>
-            </a:pPr>
-            <a:r>
-              <a:rPr dirty="0"/>
-              <a:t>— </a:t>
-            </a:r>
-            <a:r>
-              <a:rPr sz="2800" dirty="0" err="1"/>
-              <a:t>HomePage</a:t>
-            </a:r>
-            <a:r>
-              <a:rPr dirty="0"/>
-              <a:t> </a:t>
-            </a:r>
-            <a:r>
-              <a:rPr dirty="0" err="1"/>
-              <a:t>開発記</a:t>
-            </a:r>
-            <a:r>
-              <a:rPr dirty="0"/>
-              <a:t> —</a:t>
             </a:r>
           </a:p>
         </p:txBody>
@@ -5359,7 +5392,7 @@
         <p:spPr>
           <a:xfrm>
             <a:off x="800000" y="3563816"/>
-            <a:ext cx="10591695" cy="400110"/>
+            <a:ext cx="10591695" cy="523220"/>
           </a:xfrm>
           <a:prstGeom prst="rect">
             <a:avLst/>
@@ -5380,14 +5413,144 @@
               </a:defRPr>
             </a:pPr>
             <a:r>
-              <a:rPr lang="ja-JP" altLang="en-US" dirty="0"/>
+              <a:rPr lang="ja-JP" altLang="en-US" sz="2800" dirty="0"/>
               <a:t>須山 哲平</a:t>
             </a:r>
-            <a:endParaRPr dirty="0"/>
+            <a:endParaRPr sz="2800" dirty="0"/>
           </a:p>
         </p:txBody>
       </p:sp>
     </p:spTree>
+  </p:cSld>
+  <p:clrMapOvr>
+    <a:masterClrMapping/>
+  </p:clrMapOvr>
+</p:sld>
+</file>
+
+<file path=ppt/slides/slide10.xml><?xml version="1.0" encoding="utf-8"?>
+<p:sld xmlns:a="http://schemas.openxmlformats.org/drawingml/2006/main" xmlns:r="http://schemas.openxmlformats.org/officeDocument/2006/relationships" xmlns:p="http://schemas.openxmlformats.org/presentationml/2006/main">
+  <p:cSld>
+    <p:bg>
+      <p:bgPr>
+        <a:solidFill>
+          <a:srgbClr val="0F172A"/>
+        </a:solidFill>
+        <a:effectLst/>
+      </p:bgPr>
+    </p:bg>
+    <p:spTree>
+      <p:nvGrpSpPr>
+        <p:cNvPr id="1" name="">
+          <a:extLst>
+            <a:ext uri="{FF2B5EF4-FFF2-40B4-BE49-F238E27FC236}">
+              <a16:creationId xmlns:a16="http://schemas.microsoft.com/office/drawing/2014/main" id="{776768AF-0C0A-8CBD-5448-0A1D9039F05E}"/>
+            </a:ext>
+          </a:extLst>
+        </p:cNvPr>
+        <p:cNvGrpSpPr/>
+        <p:nvPr/>
+      </p:nvGrpSpPr>
+      <p:grpSpPr>
+        <a:xfrm>
+          <a:off x="0" y="0"/>
+          <a:ext cx="0" cy="0"/>
+          <a:chOff x="0" y="0"/>
+          <a:chExt cx="0" cy="0"/>
+        </a:xfrm>
+      </p:grpSpPr>
+      <p:sp>
+        <p:nvSpPr>
+          <p:cNvPr id="2" name="TextBox 1">
+            <a:extLst>
+              <a:ext uri="{FF2B5EF4-FFF2-40B4-BE49-F238E27FC236}">
+                <a16:creationId xmlns:a16="http://schemas.microsoft.com/office/drawing/2014/main" id="{BF2089D5-455D-5512-E005-46563C7FFA83}"/>
+              </a:ext>
+            </a:extLst>
+          </p:cNvPr>
+          <p:cNvSpPr txBox="1"/>
+          <p:nvPr/>
+        </p:nvSpPr>
+        <p:spPr>
+          <a:xfrm>
+            <a:off x="800000" y="2568342"/>
+            <a:ext cx="10591695" cy="707886"/>
+          </a:xfrm>
+          <a:prstGeom prst="rect">
+            <a:avLst/>
+          </a:prstGeom>
+          <a:noFill/>
+        </p:spPr>
+        <p:txBody>
+          <a:bodyPr wrap="square">
+            <a:spAutoFit/>
+          </a:bodyPr>
+          <a:lstStyle/>
+          <a:p>
+            <a:pPr algn="ctr">
+              <a:defRPr sz="3200" b="1">
+                <a:solidFill>
+                  <a:srgbClr val="60A5FA"/>
+                </a:solidFill>
+              </a:defRPr>
+            </a:pPr>
+            <a:r>
+              <a:rPr lang="ja-JP" altLang="en-US" sz="4000" dirty="0"/>
+              <a:t>ご清聴ありがとうございました</a:t>
+            </a:r>
+            <a:endParaRPr sz="4000" dirty="0"/>
+          </a:p>
+        </p:txBody>
+      </p:sp>
+      <p:sp>
+        <p:nvSpPr>
+          <p:cNvPr id="4" name="TextBox 2">
+            <a:extLst>
+              <a:ext uri="{FF2B5EF4-FFF2-40B4-BE49-F238E27FC236}">
+                <a16:creationId xmlns:a16="http://schemas.microsoft.com/office/drawing/2014/main" id="{4C967B40-6251-4914-278D-1C30B7CF87A3}"/>
+              </a:ext>
+            </a:extLst>
+          </p:cNvPr>
+          <p:cNvSpPr txBox="1"/>
+          <p:nvPr/>
+        </p:nvSpPr>
+        <p:spPr>
+          <a:xfrm>
+            <a:off x="800000" y="3563816"/>
+            <a:ext cx="10591695" cy="523220"/>
+          </a:xfrm>
+          <a:prstGeom prst="rect">
+            <a:avLst/>
+          </a:prstGeom>
+          <a:noFill/>
+        </p:spPr>
+        <p:txBody>
+          <a:bodyPr wrap="square">
+            <a:spAutoFit/>
+          </a:bodyPr>
+          <a:lstStyle/>
+          <a:p>
+            <a:pPr algn="ctr">
+              <a:defRPr sz="2000" b="0">
+                <a:solidFill>
+                  <a:srgbClr val="A78BFA"/>
+                </a:solidFill>
+              </a:defRPr>
+            </a:pPr>
+            <a:r>
+              <a:rPr lang="ja-JP" altLang="en-US" sz="2800" dirty="0"/>
+              <a:t>須山 哲平</a:t>
+            </a:r>
+            <a:endParaRPr sz="2800" dirty="0"/>
+          </a:p>
+        </p:txBody>
+      </p:sp>
+    </p:spTree>
+    <p:extLst>
+      <p:ext uri="{BB962C8B-B14F-4D97-AF65-F5344CB8AC3E}">
+        <p14:creationId xmlns:p14="http://schemas.microsoft.com/office/powerpoint/2010/main" val="1552236356"/>
+      </p:ext>
+    </p:extLst>
   </p:cSld>
   <p:clrMapOvr>
     <a:masterClrMapping/>
@@ -5515,7 +5678,7 @@
         <p:spPr>
           <a:xfrm>
             <a:off x="960120" y="1234440"/>
-            <a:ext cx="5166360" cy="4754880"/>
+            <a:ext cx="5166360" cy="2862322"/>
           </a:xfrm>
           <a:prstGeom prst="rect">
             <a:avLst/>
@@ -5530,7 +5693,7 @@
           <a:p>
             <a:pPr algn="l"/>
             <a:r>
-              <a:rPr sz="1200" b="1">
+              <a:rPr sz="1200" b="1" dirty="0">
                 <a:solidFill>
                   <a:srgbClr val="A78BFA"/>
                 </a:solidFill>
@@ -5542,7 +5705,7 @@
           <a:p>
             <a:pPr algn="l"/>
             <a:r>
-              <a:rPr sz="2000" b="1">
+              <a:rPr sz="2000" b="1" dirty="0">
                 <a:solidFill>
                   <a:srgbClr val="E2E8F0"/>
                 </a:solidFill>
@@ -5554,18 +5717,42 @@
           <a:p>
             <a:pPr algn="l"/>
             <a:r>
-              <a:rPr sz="1300" b="0">
+              <a:rPr sz="1300" b="0" dirty="0">
                 <a:solidFill>
                   <a:srgbClr val="94A3B8"/>
                 </a:solidFill>
                 <a:latin typeface="Yu Gothic UI"/>
               </a:rPr>
-              <a:t>27歳 / IT業界 5年目 / 副業エンジニア</a:t>
-            </a:r>
-          </a:p>
-          <a:p>
-            <a:pPr algn="l"/>
-            <a:endParaRPr sz="1300" b="0">
+              <a:t>27歳 / </a:t>
+            </a:r>
+            <a:r>
+              <a:rPr sz="1300" b="0" dirty="0" err="1">
+                <a:solidFill>
+                  <a:srgbClr val="94A3B8"/>
+                </a:solidFill>
+                <a:latin typeface="Yu Gothic UI"/>
+              </a:rPr>
+              <a:t>IT業界</a:t>
+            </a:r>
+            <a:r>
+              <a:rPr sz="1300" b="0" dirty="0">
+                <a:solidFill>
+                  <a:srgbClr val="94A3B8"/>
+                </a:solidFill>
+                <a:latin typeface="Yu Gothic UI"/>
+              </a:rPr>
+              <a:t> 5年目 / </a:t>
+            </a:r>
+            <a:r>
+              <a:rPr sz="1300" b="0" dirty="0" err="1">
+                <a:solidFill>
+                  <a:srgbClr val="94A3B8"/>
+                </a:solidFill>
+                <a:latin typeface="Yu Gothic UI"/>
+              </a:rPr>
+              <a:t>エンジニア</a:t>
+            </a:r>
+            <a:endParaRPr sz="1300" b="0" dirty="0">
               <a:solidFill>
                 <a:srgbClr val="94A3B8"/>
               </a:solidFill>
@@ -5574,8 +5761,17 @@
           </a:p>
           <a:p>
             <a:pPr algn="l"/>
-            <a:r>
-              <a:rPr sz="1200" b="1">
+            <a:endParaRPr sz="1300" b="0" dirty="0">
+              <a:solidFill>
+                <a:srgbClr val="94A3B8"/>
+              </a:solidFill>
+              <a:latin typeface="Yu Gothic UI"/>
+            </a:endParaRPr>
+          </a:p>
+          <a:p>
+            <a:pPr algn="l"/>
+            <a:r>
+              <a:rPr sz="1200" b="1" dirty="0">
                 <a:solidFill>
                   <a:srgbClr val="A78BFA"/>
                 </a:solidFill>
@@ -5587,7 +5783,7 @@
           <a:p>
             <a:pPr algn="l"/>
             <a:r>
-              <a:rPr sz="1300" b="0">
+              <a:rPr sz="1300" b="0" dirty="0">
                 <a:solidFill>
                   <a:srgbClr val="E2E8F0"/>
                 </a:solidFill>
@@ -5599,30 +5795,102 @@
           <a:p>
             <a:pPr algn="l"/>
             <a:r>
-              <a:rPr sz="1300" b="0">
+              <a:rPr sz="1300" b="0" dirty="0">
                 <a:solidFill>
                   <a:srgbClr val="E2E8F0"/>
                 </a:solidFill>
                 <a:latin typeface="Yu Gothic UI"/>
               </a:rPr>
-              <a:t>• SES（現職 / フルスタック）</a:t>
+              <a:t>• </a:t>
+            </a:r>
+            <a:r>
+              <a:rPr sz="1300" b="0" dirty="0" err="1">
+                <a:solidFill>
+                  <a:srgbClr val="E2E8F0"/>
+                </a:solidFill>
+                <a:latin typeface="Yu Gothic UI"/>
+              </a:rPr>
+              <a:t>SES（現職</a:t>
+            </a:r>
+            <a:r>
+              <a:rPr sz="1300" b="0" dirty="0">
+                <a:solidFill>
+                  <a:srgbClr val="E2E8F0"/>
+                </a:solidFill>
+                <a:latin typeface="Yu Gothic UI"/>
+              </a:rPr>
+              <a:t> / </a:t>
+            </a:r>
+            <a:r>
+              <a:rPr sz="1300" b="0" dirty="0" err="1">
+                <a:solidFill>
+                  <a:srgbClr val="E2E8F0"/>
+                </a:solidFill>
+                <a:latin typeface="Yu Gothic UI"/>
+              </a:rPr>
+              <a:t>フルスタック</a:t>
+            </a:r>
+            <a:r>
+              <a:rPr sz="1300" b="0" dirty="0">
+                <a:solidFill>
+                  <a:srgbClr val="E2E8F0"/>
+                </a:solidFill>
+                <a:latin typeface="Yu Gothic UI"/>
+              </a:rPr>
+              <a:t>）</a:t>
             </a:r>
           </a:p>
           <a:p>
             <a:pPr algn="l"/>
             <a:r>
-              <a:rPr sz="1300" b="0">
+              <a:rPr sz="1300" b="0" dirty="0">
                 <a:solidFill>
                   <a:srgbClr val="E2E8F0"/>
                 </a:solidFill>
                 <a:latin typeface="Yu Gothic UI"/>
               </a:rPr>
-              <a:t>• 業務委託 副業（約1年）</a:t>
+              <a:t>• </a:t>
+            </a:r>
+            <a:r>
+              <a:rPr sz="1300" b="0" dirty="0" err="1">
+                <a:solidFill>
+                  <a:srgbClr val="E2E8F0"/>
+                </a:solidFill>
+                <a:latin typeface="Yu Gothic UI"/>
+              </a:rPr>
+              <a:t>業務委託</a:t>
+            </a:r>
+            <a:r>
+              <a:rPr sz="1300" b="0" dirty="0">
+                <a:solidFill>
+                  <a:srgbClr val="E2E8F0"/>
+                </a:solidFill>
+                <a:latin typeface="Yu Gothic UI"/>
+              </a:rPr>
+              <a:t> 副業（1年</a:t>
+            </a:r>
+            <a:r>
+              <a:rPr lang="ja-JP" altLang="en-US" sz="1300" b="0" dirty="0">
+                <a:solidFill>
+                  <a:srgbClr val="E2E8F0"/>
+                </a:solidFill>
+                <a:latin typeface="Yu Gothic UI"/>
+              </a:rPr>
+              <a:t>目</a:t>
+            </a:r>
+            <a:r>
+              <a:rPr sz="1300" b="0" dirty="0">
+                <a:solidFill>
+                  <a:srgbClr val="E2E8F0"/>
+                </a:solidFill>
+                <a:latin typeface="Yu Gothic UI"/>
+              </a:rPr>
+              <a:t>）</a:t>
             </a:r>
           </a:p>
           <a:p>
             <a:pPr algn="l"/>
-            <a:endParaRPr sz="1300" b="0">
+            <a:endParaRPr sz="1300" b="0" dirty="0">
               <a:solidFill>
                 <a:srgbClr val="E2E8F0"/>
               </a:solidFill>
@@ -5632,49 +5900,145 @@
           <a:p>
             <a:pPr algn="l"/>
             <a:r>
-              <a:rPr sz="1200" b="1">
+              <a:rPr sz="1200" b="1" dirty="0" err="1">
                 <a:solidFill>
                   <a:srgbClr val="A78BFA"/>
                 </a:solidFill>
                 <a:latin typeface="Yu Gothic UI"/>
               </a:rPr>
-              <a:t>AI駆動開発 個人開発実績</a:t>
-            </a:r>
+              <a:t>AI駆動開発</a:t>
+            </a:r>
+            <a:r>
+              <a:rPr sz="1200" b="1" dirty="0">
+                <a:solidFill>
+                  <a:srgbClr val="A78BFA"/>
+                </a:solidFill>
+                <a:latin typeface="Yu Gothic UI"/>
+              </a:rPr>
+              <a:t> </a:t>
+            </a:r>
+            <a:r>
+              <a:rPr sz="1200" b="1" dirty="0" err="1">
+                <a:solidFill>
+                  <a:srgbClr val="A78BFA"/>
+                </a:solidFill>
+                <a:latin typeface="Yu Gothic UI"/>
+              </a:rPr>
+              <a:t>個人開発実績</a:t>
+            </a:r>
+            <a:endParaRPr sz="1200" b="1" dirty="0">
+              <a:solidFill>
+                <a:srgbClr val="A78BFA"/>
+              </a:solidFill>
+              <a:latin typeface="Yu Gothic UI"/>
+            </a:endParaRPr>
           </a:p>
           <a:p>
             <a:pPr algn="l"/>
             <a:r>
-              <a:rPr sz="1300" b="0">
+              <a:rPr sz="1300" b="0" dirty="0">
                 <a:solidFill>
                   <a:srgbClr val="E2E8F0"/>
                 </a:solidFill>
                 <a:latin typeface="Yu Gothic UI"/>
               </a:rPr>
-              <a:t>① ユメハシ (Flutter/Dart)  ──  21日</a:t>
+              <a:t>① </a:t>
+            </a:r>
+            <a:r>
+              <a:rPr sz="1300" b="0" dirty="0" err="1">
+                <a:solidFill>
+                  <a:srgbClr val="E2E8F0"/>
+                </a:solidFill>
+                <a:latin typeface="Yu Gothic UI"/>
+              </a:rPr>
+              <a:t>ユメハシ</a:t>
+            </a:r>
+            <a:r>
+              <a:rPr sz="1300" b="0" dirty="0">
+                <a:solidFill>
+                  <a:srgbClr val="E2E8F0"/>
+                </a:solidFill>
+                <a:latin typeface="Yu Gothic UI"/>
+              </a:rPr>
+              <a:t> (Flutter/Dart)  ──  21日</a:t>
             </a:r>
           </a:p>
           <a:p>
             <a:pPr algn="l"/>
             <a:r>
-              <a:rPr sz="1300" b="0">
+              <a:rPr sz="1300" b="0" dirty="0">
                 <a:solidFill>
                   <a:srgbClr val="E2E8F0"/>
                 </a:solidFill>
                 <a:latin typeface="Yu Gothic UI"/>
               </a:rPr>
-              <a:t>② Defrago (Python/FastAPI)  ──  14日</a:t>
+              <a:t>② </a:t>
+            </a:r>
+            <a:r>
+              <a:rPr sz="1300" b="0" dirty="0" err="1">
+                <a:solidFill>
+                  <a:srgbClr val="E2E8F0"/>
+                </a:solidFill>
+                <a:latin typeface="Yu Gothic UI"/>
+              </a:rPr>
+              <a:t>Defrago</a:t>
+            </a:r>
+            <a:r>
+              <a:rPr sz="1300" b="0" dirty="0">
+                <a:solidFill>
+                  <a:srgbClr val="E2E8F0"/>
+                </a:solidFill>
+                <a:latin typeface="Yu Gothic UI"/>
+              </a:rPr>
+              <a:t> (Python/</a:t>
+            </a:r>
+            <a:r>
+              <a:rPr sz="1300" b="0" dirty="0" err="1">
+                <a:solidFill>
+                  <a:srgbClr val="E2E8F0"/>
+                </a:solidFill>
+                <a:latin typeface="Yu Gothic UI"/>
+              </a:rPr>
+              <a:t>FastAPI</a:t>
+            </a:r>
+            <a:r>
+              <a:rPr sz="1300" b="0" dirty="0">
+                <a:solidFill>
+                  <a:srgbClr val="E2E8F0"/>
+                </a:solidFill>
+                <a:latin typeface="Yu Gothic UI"/>
+              </a:rPr>
+              <a:t>)  ──  14日</a:t>
             </a:r>
           </a:p>
           <a:p>
             <a:pPr algn="l"/>
             <a:r>
-              <a:rPr sz="1400" b="1">
+              <a:rPr sz="1400" b="1" dirty="0">
                 <a:solidFill>
                   <a:srgbClr val="60A5FA"/>
                 </a:solidFill>
                 <a:latin typeface="Yu Gothic UI"/>
               </a:rPr>
-              <a:t>③ HomePage (Astro/TS)  ──  5日  ← 本LT題材</a:t>
+              <a:t>③ </a:t>
+            </a:r>
+            <a:r>
+              <a:rPr sz="1400" b="1" dirty="0" err="1">
+                <a:solidFill>
+                  <a:srgbClr val="60A5FA"/>
+                </a:solidFill>
+                <a:latin typeface="Yu Gothic UI"/>
+              </a:rPr>
+              <a:t>HomePage</a:t>
+            </a:r>
+            <a:r>
+              <a:rPr sz="1400" b="1" dirty="0">
+                <a:solidFill>
+                  <a:srgbClr val="60A5FA"/>
+                </a:solidFill>
+                <a:latin typeface="Yu Gothic UI"/>
+              </a:rPr>
+              <a:t> (Astro/TS)  ──  5日</a:t>
             </a:r>
           </a:p>
         </p:txBody>
@@ -11738,7 +12102,7 @@
         <p:spPr>
           <a:xfrm>
             <a:off x="8183879" y="4023360"/>
-            <a:ext cx="3108960" cy="1645920"/>
+            <a:ext cx="3108960" cy="738664"/>
           </a:xfrm>
           <a:prstGeom prst="rect">
             <a:avLst/>
@@ -11753,38 +12117,95 @@
           <a:p>
             <a:pPr algn="l"/>
             <a:r>
-              <a:rPr sz="1200" b="0">
+              <a:rPr sz="1200" b="0" dirty="0" err="1">
                 <a:solidFill>
                   <a:srgbClr val="E2E8F0"/>
                 </a:solidFill>
                 <a:latin typeface="Yu Gothic UI"/>
               </a:rPr>
-              <a:t>Qiita 記事をビルド時に自動取得。</a:t>
+              <a:t>Qiita</a:t>
+            </a:r>
+            <a:r>
+              <a:rPr sz="1200" b="0" dirty="0">
+                <a:solidFill>
+                  <a:srgbClr val="E2E8F0"/>
+                </a:solidFill>
+                <a:latin typeface="Yu Gothic UI"/>
+              </a:rPr>
+              <a:t> </a:t>
+            </a:r>
+            <a:r>
+              <a:rPr sz="1200" b="0" dirty="0" err="1">
+                <a:solidFill>
+                  <a:srgbClr val="E2E8F0"/>
+                </a:solidFill>
+                <a:latin typeface="Yu Gothic UI"/>
+              </a:rPr>
+              <a:t>記事をビルド時に自動取得</a:t>
+            </a:r>
+            <a:r>
+              <a:rPr sz="1200" b="0" dirty="0">
+                <a:solidFill>
+                  <a:srgbClr val="E2E8F0"/>
+                </a:solidFill>
+                <a:latin typeface="Yu Gothic UI"/>
+              </a:rPr>
+              <a:t>。</a:t>
             </a:r>
           </a:p>
           <a:p>
             <a:pPr algn="l"/>
             <a:r>
-              <a:rPr sz="1200" b="0">
+              <a:rPr lang="ja-JP" altLang="en-US" sz="1200" b="0" dirty="0">
                 <a:solidFill>
                   <a:srgbClr val="E2E8F0"/>
                 </a:solidFill>
                 <a:latin typeface="Yu Gothic UI"/>
               </a:rPr>
-              <a:t>Work &amp; Dev / Essay / Tech の3軸で</a:t>
-            </a:r>
-          </a:p>
-          <a:p>
-            <a:pPr algn="l"/>
-            <a:r>
-              <a:rPr sz="1200" b="0">
+              <a:t>毎日の投稿予約機能等を用いることで</a:t>
+            </a:r>
+            <a:r>
+              <a:rPr lang="en-US" altLang="ja-JP" sz="1200" b="0" dirty="0">
                 <a:solidFill>
                   <a:srgbClr val="E2E8F0"/>
                 </a:solidFill>
                 <a:latin typeface="Yu Gothic UI"/>
               </a:rPr>
-              <a:t>発信を継続できる仕組み。</a:t>
-            </a:r>
+              <a:t>1</a:t>
+            </a:r>
+            <a:r>
+              <a:rPr lang="ja-JP" altLang="en-US" sz="1200" b="0" dirty="0">
+                <a:solidFill>
+                  <a:srgbClr val="E2E8F0"/>
+                </a:solidFill>
+                <a:latin typeface="Yu Gothic UI"/>
+              </a:rPr>
+              <a:t>日</a:t>
+            </a:r>
+            <a:r>
+              <a:rPr lang="en-US" altLang="ja-JP" sz="1200" b="0" dirty="0">
+                <a:solidFill>
+                  <a:srgbClr val="E2E8F0"/>
+                </a:solidFill>
+                <a:latin typeface="Yu Gothic UI"/>
+              </a:rPr>
+              <a:t>1</a:t>
+            </a:r>
+            <a:r>
+              <a:rPr lang="ja-JP" altLang="en-US" sz="1200" b="0" dirty="0">
+                <a:solidFill>
+                  <a:srgbClr val="E2E8F0"/>
+                </a:solidFill>
+                <a:latin typeface="Yu Gothic UI"/>
+              </a:rPr>
+              <a:t>投稿を目指す。</a:t>
+            </a:r>
+            <a:endParaRPr sz="1200" b="0" dirty="0">
+              <a:solidFill>
+                <a:srgbClr val="E2E8F0"/>
+              </a:solidFill>
+              <a:latin typeface="Yu Gothic UI"/>
+            </a:endParaRPr>
           </a:p>
         </p:txBody>
       </p:sp>

--- a/docs/PR/LT/HomePage_開発者用.pptx
+++ b/docs/PR/LT/HomePage_開発者用.pptx
@@ -217,7 +217,7 @@
           <a:p>
             <a:fld id="{B5390508-11FE-4107-B12B-FCBF7DE7140E}" type="datetimeFigureOut">
               <a:rPr kumimoji="1" lang="ja-JP" altLang="en-US" smtClean="0"/>
-              <a:t>2026/4/10</a:t>
+              <a:t>2026/4/22</a:t>
             </a:fld>
             <a:endParaRPr kumimoji="1" lang="ja-JP" altLang="en-US"/>
           </a:p>
@@ -2531,7 +2531,7 @@
           <a:p>
             <a:fld id="{5BCAD085-E8A6-8845-BD4E-CB4CCA059FC4}" type="datetimeFigureOut">
               <a:rPr lang="en-US" smtClean="0"/>
-              <a:t>4/10/2026</a:t>
+              <a:t>4/22/2026</a:t>
             </a:fld>
             <a:endParaRPr lang="en-US"/>
           </a:p>
@@ -2699,7 +2699,7 @@
           <a:p>
             <a:fld id="{5BCAD085-E8A6-8845-BD4E-CB4CCA059FC4}" type="datetimeFigureOut">
               <a:rPr lang="en-US" smtClean="0"/>
-              <a:t>4/10/2026</a:t>
+              <a:t>4/22/2026</a:t>
             </a:fld>
             <a:endParaRPr lang="en-US"/>
           </a:p>
@@ -2877,7 +2877,7 @@
           <a:p>
             <a:fld id="{5BCAD085-E8A6-8845-BD4E-CB4CCA059FC4}" type="datetimeFigureOut">
               <a:rPr lang="en-US" smtClean="0"/>
-              <a:t>4/10/2026</a:t>
+              <a:t>4/22/2026</a:t>
             </a:fld>
             <a:endParaRPr lang="en-US"/>
           </a:p>
@@ -3045,7 +3045,7 @@
           <a:p>
             <a:fld id="{5BCAD085-E8A6-8845-BD4E-CB4CCA059FC4}" type="datetimeFigureOut">
               <a:rPr lang="en-US" smtClean="0"/>
-              <a:t>4/10/2026</a:t>
+              <a:t>4/22/2026</a:t>
             </a:fld>
             <a:endParaRPr lang="en-US"/>
           </a:p>
@@ -3290,7 +3290,7 @@
           <a:p>
             <a:fld id="{5BCAD085-E8A6-8845-BD4E-CB4CCA059FC4}" type="datetimeFigureOut">
               <a:rPr lang="en-US" smtClean="0"/>
-              <a:t>4/10/2026</a:t>
+              <a:t>4/22/2026</a:t>
             </a:fld>
             <a:endParaRPr lang="en-US"/>
           </a:p>
@@ -3575,7 +3575,7 @@
           <a:p>
             <a:fld id="{5BCAD085-E8A6-8845-BD4E-CB4CCA059FC4}" type="datetimeFigureOut">
               <a:rPr lang="en-US" smtClean="0"/>
-              <a:t>4/10/2026</a:t>
+              <a:t>4/22/2026</a:t>
             </a:fld>
             <a:endParaRPr lang="en-US"/>
           </a:p>
@@ -3994,7 +3994,7 @@
           <a:p>
             <a:fld id="{5BCAD085-E8A6-8845-BD4E-CB4CCA059FC4}" type="datetimeFigureOut">
               <a:rPr lang="en-US" smtClean="0"/>
-              <a:t>4/10/2026</a:t>
+              <a:t>4/22/2026</a:t>
             </a:fld>
             <a:endParaRPr lang="en-US"/>
           </a:p>
@@ -4111,7 +4111,7 @@
           <a:p>
             <a:fld id="{5BCAD085-E8A6-8845-BD4E-CB4CCA059FC4}" type="datetimeFigureOut">
               <a:rPr lang="en-US" smtClean="0"/>
-              <a:t>4/10/2026</a:t>
+              <a:t>4/22/2026</a:t>
             </a:fld>
             <a:endParaRPr lang="en-US"/>
           </a:p>
@@ -4206,7 +4206,7 @@
           <a:p>
             <a:fld id="{5BCAD085-E8A6-8845-BD4E-CB4CCA059FC4}" type="datetimeFigureOut">
               <a:rPr lang="en-US" smtClean="0"/>
-              <a:t>4/10/2026</a:t>
+              <a:t>4/22/2026</a:t>
             </a:fld>
             <a:endParaRPr lang="en-US"/>
           </a:p>
@@ -4481,7 +4481,7 @@
           <a:p>
             <a:fld id="{5BCAD085-E8A6-8845-BD4E-CB4CCA059FC4}" type="datetimeFigureOut">
               <a:rPr lang="en-US" smtClean="0"/>
-              <a:t>4/10/2026</a:t>
+              <a:t>4/22/2026</a:t>
             </a:fld>
             <a:endParaRPr lang="en-US"/>
           </a:p>
@@ -4733,7 +4733,7 @@
           <a:p>
             <a:fld id="{5BCAD085-E8A6-8845-BD4E-CB4CCA059FC4}" type="datetimeFigureOut">
               <a:rPr lang="en-US" smtClean="0"/>
-              <a:t>4/10/2026</a:t>
+              <a:t>4/22/2026</a:t>
             </a:fld>
             <a:endParaRPr lang="en-US"/>
           </a:p>
@@ -4944,7 +4944,7 @@
           <a:p>
             <a:fld id="{5BCAD085-E8A6-8845-BD4E-CB4CCA059FC4}" type="datetimeFigureOut">
               <a:rPr lang="en-US" smtClean="0"/>
-              <a:t>4/10/2026</a:t>
+              <a:t>4/22/2026</a:t>
             </a:fld>
             <a:endParaRPr lang="en-US"/>
           </a:p>
@@ -5372,7 +5372,7 @@
             </a:pPr>
             <a:r>
               <a:rPr sz="4000" dirty="0"/>
-              <a:t>5日間でホームページを作った話</a:t>
+              <a:t>Astro v6 × AI駆動開発で 5日間でホームページを作った話</a:t>
             </a:r>
           </a:p>
         </p:txBody>
@@ -5391,7 +5391,7 @@
         </p:nvSpPr>
         <p:spPr>
           <a:xfrm>
-            <a:off x="800000" y="3563816"/>
+            <a:off x="800000" y="4087036"/>
             <a:ext cx="10591695" cy="523220"/>
           </a:xfrm>
           <a:prstGeom prst="rect">
@@ -5539,7 +5539,7 @@
             </a:pPr>
             <a:r>
               <a:rPr lang="ja-JP" altLang="en-US" sz="2800" dirty="0"/>
-              <a:t>須山 哲平</a:t>
+              <a:t>須山 哲平  /  https://teppei19980914.github.io/HomePage/</a:t>
             </a:r>
             <a:endParaRPr sz="2800" dirty="0"/>
           </a:p>
@@ -5723,41 +5723,8 @@
                 </a:solidFill>
                 <a:latin typeface="Yu Gothic UI"/>
               </a:rPr>
-              <a:t>27歳 / </a:t>
-            </a:r>
-            <a:r>
-              <a:rPr sz="1300" b="0" dirty="0" err="1">
-                <a:solidFill>
-                  <a:srgbClr val="94A3B8"/>
-                </a:solidFill>
-                <a:latin typeface="Yu Gothic UI"/>
-              </a:rPr>
-              <a:t>IT業界</a:t>
-            </a:r>
-            <a:r>
-              <a:rPr sz="1300" b="0" dirty="0">
-                <a:solidFill>
-                  <a:srgbClr val="94A3B8"/>
-                </a:solidFill>
-                <a:latin typeface="Yu Gothic UI"/>
-              </a:rPr>
-              <a:t> 5年目 / </a:t>
-            </a:r>
-            <a:r>
-              <a:rPr sz="1300" b="0" dirty="0" err="1">
-                <a:solidFill>
-                  <a:srgbClr val="94A3B8"/>
-                </a:solidFill>
-                <a:latin typeface="Yu Gothic UI"/>
-              </a:rPr>
-              <a:t>エンジニア</a:t>
-            </a:r>
-            <a:endParaRPr sz="1300" b="0" dirty="0">
-              <a:solidFill>
-                <a:srgbClr val="94A3B8"/>
-              </a:solidFill>
-              <a:latin typeface="Yu Gothic UI"/>
-            </a:endParaRPr>
+              <a:t>27歳 / エンジニア5年目 / フルスタック</a:t>
+            </a:r>
           </a:p>
           <a:p>
             <a:pPr algn="l"/>
@@ -5789,7 +5756,7 @@
                 </a:solidFill>
                 <a:latin typeface="Yu Gothic UI"/>
               </a:rPr>
-              <a:t>• パッケージ開発（約3年）</a:t>
+              <a:t>• パッケージ開発(約3年)</a:t>
             </a:r>
           </a:p>
           <a:p>
@@ -5801,91 +5768,19 @@
                 </a:solidFill>
                 <a:latin typeface="Yu Gothic UI"/>
               </a:rPr>
-              <a:t>• </a:t>
-            </a:r>
-            <a:r>
-              <a:rPr sz="1300" b="0" dirty="0" err="1">
+              <a:t>• SES・業務委託(現職 / フルスタック)</a:t>
+            </a:r>
+          </a:p>
+          <a:p>
+            <a:pPr algn="l"/>
+            <a:r>
+              <a:rPr sz="1300" b="0" dirty="0">
                 <a:solidFill>
                   <a:srgbClr val="E2E8F0"/>
                 </a:solidFill>
                 <a:latin typeface="Yu Gothic UI"/>
               </a:rPr>
-              <a:t>SES（現職</a:t>
-            </a:r>
-            <a:r>
-              <a:rPr sz="1300" b="0" dirty="0">
-                <a:solidFill>
-                  <a:srgbClr val="E2E8F0"/>
-                </a:solidFill>
-                <a:latin typeface="Yu Gothic UI"/>
-              </a:rPr>
-              <a:t> / </a:t>
-            </a:r>
-            <a:r>
-              <a:rPr sz="1300" b="0" dirty="0" err="1">
-                <a:solidFill>
-                  <a:srgbClr val="E2E8F0"/>
-                </a:solidFill>
-                <a:latin typeface="Yu Gothic UI"/>
-              </a:rPr>
-              <a:t>フルスタック</a:t>
-            </a:r>
-            <a:r>
-              <a:rPr sz="1300" b="0" dirty="0">
-                <a:solidFill>
-                  <a:srgbClr val="E2E8F0"/>
-                </a:solidFill>
-                <a:latin typeface="Yu Gothic UI"/>
-              </a:rPr>
-              <a:t>）</a:t>
-            </a:r>
-          </a:p>
-          <a:p>
-            <a:pPr algn="l"/>
-            <a:r>
-              <a:rPr sz="1300" b="0" dirty="0">
-                <a:solidFill>
-                  <a:srgbClr val="E2E8F0"/>
-                </a:solidFill>
-                <a:latin typeface="Yu Gothic UI"/>
-              </a:rPr>
-              <a:t>• </a:t>
-            </a:r>
-            <a:r>
-              <a:rPr sz="1300" b="0" dirty="0" err="1">
-                <a:solidFill>
-                  <a:srgbClr val="E2E8F0"/>
-                </a:solidFill>
-                <a:latin typeface="Yu Gothic UI"/>
-              </a:rPr>
-              <a:t>業務委託</a:t>
-            </a:r>
-            <a:r>
-              <a:rPr sz="1300" b="0" dirty="0">
-                <a:solidFill>
-                  <a:srgbClr val="E2E8F0"/>
-                </a:solidFill>
-                <a:latin typeface="Yu Gothic UI"/>
-              </a:rPr>
-              <a:t> 副業（1年</a:t>
-            </a:r>
-            <a:r>
-              <a:rPr lang="ja-JP" altLang="en-US" sz="1300" b="0" dirty="0">
-                <a:solidFill>
-                  <a:srgbClr val="E2E8F0"/>
-                </a:solidFill>
-                <a:latin typeface="Yu Gothic UI"/>
-              </a:rPr>
-              <a:t>目</a:t>
-            </a:r>
-            <a:r>
-              <a:rPr sz="1300" b="0" dirty="0">
-                <a:solidFill>
-                  <a:srgbClr val="E2E8F0"/>
-                </a:solidFill>
-                <a:latin typeface="Yu Gothic UI"/>
-              </a:rPr>
-              <a:t>）</a:t>
+              <a:t>• Qiita 211記事 / 個人開発3作を並行運用</a:t>
             </a:r>
           </a:p>
           <a:p>
@@ -5906,25 +5801,7 @@
                 </a:solidFill>
                 <a:latin typeface="Yu Gothic UI"/>
               </a:rPr>
-              <a:t>AI駆動開発</a:t>
-            </a:r>
-            <a:r>
-              <a:rPr sz="1200" b="1" dirty="0">
-                <a:solidFill>
-                  <a:srgbClr val="A78BFA"/>
-                </a:solidFill>
-                <a:latin typeface="Yu Gothic UI"/>
-              </a:rPr>
-              <a:t> </a:t>
-            </a:r>
-            <a:r>
-              <a:rPr sz="1200" b="1" dirty="0" err="1">
-                <a:solidFill>
-                  <a:srgbClr val="A78BFA"/>
-                </a:solidFill>
-                <a:latin typeface="Yu Gothic UI"/>
-              </a:rPr>
-              <a:t>個人開発実績</a:t>
+              <a:t>AI駆動開発 個人開発実績</a:t>
             </a:r>
             <a:endParaRPr sz="1200" b="1" dirty="0">
               <a:solidFill>
@@ -5936,37 +5813,46 @@
           <a:p>
             <a:pPr algn="l"/>
             <a:r>
-              <a:rPr sz="1300" b="0" dirty="0">
+              <a:rPr lang="ja-JP" altLang="en-US" sz="1300" b="0" dirty="0">
                 <a:solidFill>
                   <a:srgbClr val="E2E8F0"/>
                 </a:solidFill>
                 <a:latin typeface="Yu Gothic UI"/>
               </a:rPr>
-              <a:t>① </a:t>
-            </a:r>
-            <a:r>
-              <a:rPr sz="1300" b="0" dirty="0" err="1">
+              <a:t>① ユメハシ </a:t>
+            </a:r>
+            <a:r>
+              <a:rPr lang="en-US" altLang="ja-JP" sz="1300" b="0" dirty="0">
                 <a:solidFill>
                   <a:srgbClr val="E2E8F0"/>
                 </a:solidFill>
                 <a:latin typeface="Yu Gothic UI"/>
               </a:rPr>
-              <a:t>ユメハシ</a:t>
-            </a:r>
-            <a:r>
-              <a:rPr sz="1300" b="0" dirty="0">
+              <a:t>(</a:t>
+            </a:r>
+            <a:r>
+              <a:rPr lang="en-US" sz="1300" b="0" dirty="0">
                 <a:solidFill>
                   <a:srgbClr val="E2E8F0"/>
                 </a:solidFill>
                 <a:latin typeface="Yu Gothic UI"/>
               </a:rPr>
-              <a:t> (Flutter/Dart)  ──  21日</a:t>
+              <a:t>Flutter/Dart)  ──  21</a:t>
+            </a:r>
+            <a:r>
+              <a:rPr lang="ja-JP" altLang="en-US" sz="1300" b="0" dirty="0">
+                <a:solidFill>
+                  <a:srgbClr val="E2E8F0"/>
+                </a:solidFill>
+                <a:latin typeface="Yu Gothic UI"/>
+              </a:rPr>
+              <a:t>日</a:t>
             </a:r>
           </a:p>
           <a:p>
             <a:pPr algn="l"/>
             <a:r>
-              <a:rPr sz="1300" b="0" dirty="0">
+              <a:rPr lang="ja-JP" altLang="en-US" sz="1300" b="0" dirty="0">
                 <a:solidFill>
                   <a:srgbClr val="E2E8F0"/>
                 </a:solidFill>
@@ -5975,7 +5861,7 @@
               <a:t>② </a:t>
             </a:r>
             <a:r>
-              <a:rPr sz="1300" b="0" dirty="0" err="1">
+              <a:rPr lang="en-US" sz="1300" b="0" dirty="0" err="1">
                 <a:solidFill>
                   <a:srgbClr val="E2E8F0"/>
                 </a:solidFill>
@@ -5984,7 +5870,7 @@
               <a:t>Defrago</a:t>
             </a:r>
             <a:r>
-              <a:rPr sz="1300" b="0" dirty="0">
+              <a:rPr lang="en-US" sz="1300" b="0" dirty="0">
                 <a:solidFill>
                   <a:srgbClr val="E2E8F0"/>
                 </a:solidFill>
@@ -5993,7 +5879,7 @@
               <a:t> (Python/</a:t>
             </a:r>
             <a:r>
-              <a:rPr sz="1300" b="0" dirty="0" err="1">
+              <a:rPr lang="en-US" sz="1300" b="0" dirty="0" err="1">
                 <a:solidFill>
                   <a:srgbClr val="E2E8F0"/>
                 </a:solidFill>
@@ -6002,13 +5888,22 @@
               <a:t>FastAPI</a:t>
             </a:r>
             <a:r>
-              <a:rPr sz="1300" b="0" dirty="0">
+              <a:rPr lang="en-US" sz="1300" b="0" dirty="0">
                 <a:solidFill>
                   <a:srgbClr val="E2E8F0"/>
                 </a:solidFill>
                 <a:latin typeface="Yu Gothic UI"/>
               </a:rPr>
-              <a:t>)  ──  14日</a:t>
+              <a:t>)  ──  14</a:t>
+            </a:r>
+            <a:r>
+              <a:rPr lang="ja-JP" altLang="en-US" sz="1300" b="0" dirty="0">
+                <a:solidFill>
+                  <a:srgbClr val="E2E8F0"/>
+                </a:solidFill>
+                <a:latin typeface="Yu Gothic UI"/>
+              </a:rPr>
+              <a:t>日</a:t>
             </a:r>
           </a:p>
           <a:p>
@@ -6020,25 +5915,7 @@
                 </a:solidFill>
                 <a:latin typeface="Yu Gothic UI"/>
               </a:rPr>
-              <a:t>③ </a:t>
-            </a:r>
-            <a:r>
-              <a:rPr sz="1400" b="1" dirty="0" err="1">
-                <a:solidFill>
-                  <a:srgbClr val="60A5FA"/>
-                </a:solidFill>
-                <a:latin typeface="Yu Gothic UI"/>
-              </a:rPr>
-              <a:t>HomePage</a:t>
-            </a:r>
-            <a:r>
-              <a:rPr sz="1400" b="1" dirty="0">
-                <a:solidFill>
-                  <a:srgbClr val="60A5FA"/>
-                </a:solidFill>
-                <a:latin typeface="Yu Gothic UI"/>
-              </a:rPr>
-              <a:t> (Astro/TS)  ──  5日</a:t>
+              <a:t>③ HomePage (Astro v6/TS)  ──  5日</a:t>
             </a:r>
           </a:p>
         </p:txBody>
@@ -6116,7 +5993,7 @@
           <a:p>
             <a:pPr algn="l"/>
             <a:r>
-              <a:rPr sz="1200" b="1">
+              <a:rPr sz="1200" b="1" dirty="0">
                 <a:solidFill>
                   <a:srgbClr val="A78BFA"/>
                 </a:solidFill>
@@ -6128,18 +6005,18 @@
           <a:p>
             <a:pPr algn="l"/>
             <a:r>
-              <a:rPr sz="2000" b="1">
+              <a:rPr sz="2000" b="1" dirty="0">
                 <a:solidFill>
                   <a:srgbClr val="E2E8F0"/>
                 </a:solidFill>
                 <a:latin typeface="Yu Gothic UI"/>
               </a:rPr>
-              <a:t>今日伝えたいこと</a:t>
+              <a:t>今日お話する3つのこと</a:t>
             </a:r>
           </a:p>
           <a:p>
             <a:pPr algn="l"/>
-            <a:endParaRPr sz="2000" b="1">
+            <a:endParaRPr sz="2000" b="1" dirty="0">
               <a:solidFill>
                 <a:srgbClr val="E2E8F0"/>
               </a:solidFill>
@@ -6149,30 +6026,60 @@
           <a:p>
             <a:pPr algn="l"/>
             <a:r>
-              <a:rPr sz="1500" b="0">
+              <a:rPr sz="1500" b="0" dirty="0">
                 <a:solidFill>
                   <a:srgbClr val="E2E8F0"/>
                 </a:solidFill>
                 <a:latin typeface="Yu Gothic UI"/>
               </a:rPr>
-              <a:t>AI駆動開発 3作目の成果を</a:t>
-            </a:r>
-          </a:p>
-          <a:p>
-            <a:pPr algn="l"/>
-            <a:r>
-              <a:rPr sz="1500" b="0">
+              <a:t>① </a:t>
+            </a:r>
+            <a:r>
+              <a:rPr sz="1500" b="0" dirty="0" err="1">
                 <a:solidFill>
                   <a:srgbClr val="E2E8F0"/>
                 </a:solidFill>
                 <a:latin typeface="Yu Gothic UI"/>
               </a:rPr>
-              <a:t>開発者の視点で「数字」で語ります</a:t>
-            </a:r>
-          </a:p>
-          <a:p>
-            <a:pPr algn="l"/>
-            <a:endParaRPr sz="1500" b="0">
+              <a:t>AI駆動開発</a:t>
+            </a:r>
+            <a:r>
+              <a:rPr sz="1500" b="0" dirty="0">
+                <a:solidFill>
+                  <a:srgbClr val="E2E8F0"/>
+                </a:solidFill>
+                <a:latin typeface="Yu Gothic UI"/>
+              </a:rPr>
+              <a:t> vs </a:t>
+            </a:r>
+            <a:r>
+              <a:rPr sz="1500" b="0" dirty="0" err="1">
+                <a:solidFill>
+                  <a:srgbClr val="E2E8F0"/>
+                </a:solidFill>
+                <a:latin typeface="Yu Gothic UI"/>
+              </a:rPr>
+              <a:t>従来開発</a:t>
+            </a:r>
+            <a:r>
+              <a:rPr sz="1500" b="0" dirty="0">
+                <a:solidFill>
+                  <a:srgbClr val="E2E8F0"/>
+                </a:solidFill>
+                <a:latin typeface="Yu Gothic UI"/>
+              </a:rPr>
+              <a:t> </a:t>
+            </a:r>
+            <a:r>
+              <a:rPr sz="1500" b="0" dirty="0" err="1">
+                <a:solidFill>
+                  <a:srgbClr val="E2E8F0"/>
+                </a:solidFill>
+                <a:latin typeface="Yu Gothic UI"/>
+              </a:rPr>
+              <a:t>を「数字」で比較</a:t>
+            </a:r>
+            <a:endParaRPr sz="1500" b="0" dirty="0">
               <a:solidFill>
                 <a:srgbClr val="E2E8F0"/>
               </a:solidFill>
@@ -6182,54 +6089,198 @@
           <a:p>
             <a:pPr algn="l"/>
             <a:r>
-              <a:rPr sz="1300" b="0">
+              <a:rPr sz="1500" b="0" dirty="0">
+                <a:solidFill>
+                  <a:srgbClr val="E2E8F0"/>
+                </a:solidFill>
+                <a:latin typeface="Yu Gothic UI"/>
+              </a:rPr>
+              <a:t>② Astro v6 — </a:t>
+            </a:r>
+            <a:r>
+              <a:rPr sz="1500" b="0" dirty="0" err="1">
+                <a:solidFill>
+                  <a:srgbClr val="E2E8F0"/>
+                </a:solidFill>
+                <a:latin typeface="Yu Gothic UI"/>
+              </a:rPr>
+              <a:t>日本ではまだ情報が少ないフレームワークの実情</a:t>
+            </a:r>
+            <a:endParaRPr sz="1500" b="0" dirty="0">
+              <a:solidFill>
+                <a:srgbClr val="E2E8F0"/>
+              </a:solidFill>
+              <a:latin typeface="Yu Gothic UI"/>
+            </a:endParaRPr>
+          </a:p>
+          <a:p>
+            <a:pPr algn="l"/>
+            <a:endParaRPr sz="1500" b="0" dirty="0">
+              <a:solidFill>
+                <a:srgbClr val="E2E8F0"/>
+              </a:solidFill>
+              <a:latin typeface="Yu Gothic UI"/>
+            </a:endParaRPr>
+          </a:p>
+          <a:p>
+            <a:pPr algn="l"/>
+            <a:r>
+              <a:rPr sz="1300" b="0" dirty="0">
                 <a:solidFill>
                   <a:srgbClr val="60A5FA"/>
                 </a:solidFill>
                 <a:latin typeface="Yu Gothic UI"/>
               </a:rPr>
-              <a:t>✓ 開発期間 5日（従来比 90%短縮）</a:t>
+              <a:t>✓ </a:t>
+            </a:r>
+            <a:r>
+              <a:rPr sz="1300" b="0" dirty="0" err="1">
+                <a:solidFill>
+                  <a:srgbClr val="60A5FA"/>
+                </a:solidFill>
+                <a:latin typeface="Yu Gothic UI"/>
+              </a:rPr>
+              <a:t>開発期間</a:t>
+            </a:r>
+            <a:r>
+              <a:rPr sz="1300" b="0" dirty="0">
+                <a:solidFill>
+                  <a:srgbClr val="60A5FA"/>
+                </a:solidFill>
+                <a:latin typeface="Yu Gothic UI"/>
+              </a:rPr>
+              <a:t> 5日(</a:t>
+            </a:r>
+            <a:r>
+              <a:rPr sz="1300" b="0" dirty="0" err="1">
+                <a:solidFill>
+                  <a:srgbClr val="60A5FA"/>
+                </a:solidFill>
+                <a:latin typeface="Yu Gothic UI"/>
+              </a:rPr>
+              <a:t>従来比</a:t>
+            </a:r>
+            <a:r>
+              <a:rPr sz="1300" b="0" dirty="0">
+                <a:solidFill>
+                  <a:srgbClr val="60A5FA"/>
+                </a:solidFill>
+                <a:latin typeface="Yu Gothic UI"/>
+              </a:rPr>
+              <a:t> 90%短縮)</a:t>
             </a:r>
           </a:p>
           <a:p>
             <a:pPr algn="l"/>
             <a:r>
-              <a:rPr sz="1300" b="0">
+              <a:rPr sz="1300" b="0" dirty="0">
                 <a:solidFill>
                   <a:srgbClr val="60A5FA"/>
                 </a:solidFill>
                 <a:latin typeface="Yu Gothic UI"/>
               </a:rPr>
-              <a:t>✓ 1日あたり 800行（従来 50〜100行）</a:t>
+              <a:t>✓ 1日あたり 800行(</a:t>
+            </a:r>
+            <a:r>
+              <a:rPr sz="1300" b="0" dirty="0" err="1">
+                <a:solidFill>
+                  <a:srgbClr val="60A5FA"/>
+                </a:solidFill>
+                <a:latin typeface="Yu Gothic UI"/>
+              </a:rPr>
+              <a:t>従来</a:t>
+            </a:r>
+            <a:r>
+              <a:rPr sz="1300" b="0" dirty="0">
+                <a:solidFill>
+                  <a:srgbClr val="60A5FA"/>
+                </a:solidFill>
+                <a:latin typeface="Yu Gothic UI"/>
+              </a:rPr>
+              <a:t> 50〜100行)</a:t>
             </a:r>
           </a:p>
           <a:p>
             <a:pPr algn="l"/>
             <a:r>
-              <a:rPr sz="1300" b="0">
+              <a:rPr sz="1300" b="0" dirty="0">
                 <a:solidFill>
                   <a:srgbClr val="60A5FA"/>
                 </a:solidFill>
                 <a:latin typeface="Yu Gothic UI"/>
               </a:rPr>
-              <a:t>✓ 月コスト 5,000円（外注比 1/100〜1/300）</a:t>
+              <a:t>✓ </a:t>
+            </a:r>
+            <a:r>
+              <a:rPr sz="1300" b="0" dirty="0" err="1">
+                <a:solidFill>
+                  <a:srgbClr val="60A5FA"/>
+                </a:solidFill>
+                <a:latin typeface="Yu Gothic UI"/>
+              </a:rPr>
+              <a:t>月コスト</a:t>
+            </a:r>
+            <a:r>
+              <a:rPr sz="1300" b="0" dirty="0">
+                <a:solidFill>
+                  <a:srgbClr val="60A5FA"/>
+                </a:solidFill>
+                <a:latin typeface="Yu Gothic UI"/>
+              </a:rPr>
+              <a:t> 5,000円(</a:t>
+            </a:r>
+            <a:r>
+              <a:rPr sz="1300" b="0" dirty="0" err="1">
+                <a:solidFill>
+                  <a:srgbClr val="60A5FA"/>
+                </a:solidFill>
+                <a:latin typeface="Yu Gothic UI"/>
+              </a:rPr>
+              <a:t>外注比</a:t>
+            </a:r>
+            <a:r>
+              <a:rPr sz="1300" b="0" dirty="0">
+                <a:solidFill>
+                  <a:srgbClr val="60A5FA"/>
+                </a:solidFill>
+                <a:latin typeface="Yu Gothic UI"/>
+              </a:rPr>
+              <a:t> 1/100〜1/300)</a:t>
             </a:r>
           </a:p>
           <a:p>
             <a:pPr algn="l"/>
             <a:r>
-              <a:rPr sz="1300" b="0">
+              <a:rPr sz="1300" b="0" dirty="0">
                 <a:solidFill>
                   <a:srgbClr val="60A5FA"/>
                 </a:solidFill>
                 <a:latin typeface="Yu Gothic UI"/>
               </a:rPr>
-              <a:t>✓ Astro 学習コスト 0日</a:t>
+              <a:t>✓ Astro v6 </a:t>
+            </a:r>
+            <a:r>
+              <a:rPr sz="1300" b="0" dirty="0" err="1">
+                <a:solidFill>
+                  <a:srgbClr val="60A5FA"/>
+                </a:solidFill>
+                <a:latin typeface="Yu Gothic UI"/>
+              </a:rPr>
+              <a:t>学習コスト</a:t>
+            </a:r>
+            <a:r>
+              <a:rPr sz="1300" b="0" dirty="0">
+                <a:solidFill>
+                  <a:srgbClr val="60A5FA"/>
+                </a:solidFill>
+                <a:latin typeface="Yu Gothic UI"/>
+              </a:rPr>
+              <a:t> 0日</a:t>
             </a:r>
           </a:p>
           <a:p>
             <a:pPr algn="l"/>
-            <a:endParaRPr sz="1300" b="0">
+            <a:endParaRPr sz="1300" b="0" dirty="0">
               <a:solidFill>
                 <a:srgbClr val="60A5FA"/>
               </a:solidFill>
@@ -6239,14 +6290,65 @@
           <a:p>
             <a:pPr algn="l"/>
             <a:r>
-              <a:rPr sz="1200" b="0">
+              <a:rPr sz="1200" b="0" dirty="0">
                 <a:solidFill>
                   <a:srgbClr val="94A3B8"/>
                 </a:solidFill>
                 <a:latin typeface="Yu Gothic UI"/>
               </a:rPr>
-              <a:t>最後に HomePage の中身も少しだけお見せします</a:t>
-            </a:r>
+              <a:t>③ </a:t>
+            </a:r>
+            <a:r>
+              <a:rPr sz="1200" b="0" dirty="0" err="1">
+                <a:solidFill>
+                  <a:srgbClr val="94A3B8"/>
+                </a:solidFill>
+                <a:latin typeface="Yu Gothic UI"/>
+              </a:rPr>
+              <a:t>最後に</a:t>
+            </a:r>
+            <a:r>
+              <a:rPr sz="1200" b="0" dirty="0">
+                <a:solidFill>
+                  <a:srgbClr val="94A3B8"/>
+                </a:solidFill>
+                <a:latin typeface="Yu Gothic UI"/>
+              </a:rPr>
+              <a:t> </a:t>
+            </a:r>
+            <a:r>
+              <a:rPr sz="1200" b="0" dirty="0" err="1">
+                <a:solidFill>
+                  <a:srgbClr val="94A3B8"/>
+                </a:solidFill>
+                <a:latin typeface="Yu Gothic UI"/>
+              </a:rPr>
+              <a:t>HomePage</a:t>
+            </a:r>
+            <a:r>
+              <a:rPr sz="1200" b="0" dirty="0">
+                <a:solidFill>
+                  <a:srgbClr val="94A3B8"/>
+                </a:solidFill>
+                <a:latin typeface="Yu Gothic UI"/>
+              </a:rPr>
+              <a:t> </a:t>
+            </a:r>
+            <a:r>
+              <a:rPr sz="1200" b="0" dirty="0" err="1">
+                <a:solidFill>
+                  <a:srgbClr val="94A3B8"/>
+                </a:solidFill>
+                <a:latin typeface="Yu Gothic UI"/>
+              </a:rPr>
+              <a:t>そのものを見てもらえると嬉しいです</a:t>
+            </a:r>
+            <a:endParaRPr sz="1200" b="0" dirty="0">
+              <a:solidFill>
+                <a:srgbClr val="94A3B8"/>
+              </a:solidFill>
+              <a:latin typeface="Yu Gothic UI"/>
+            </a:endParaRPr>
           </a:p>
         </p:txBody>
       </p:sp>
@@ -6478,7 +6580,7 @@
           <a:p>
             <a:pPr algn="l"/>
             <a:r>
-              <a:rPr sz="1200" b="1">
+              <a:rPr sz="1200" b="1" dirty="0">
                 <a:solidFill>
                   <a:srgbClr val="A78BFA"/>
                 </a:solidFill>
@@ -6490,18 +6592,45 @@
           <a:p>
             <a:pPr algn="l"/>
             <a:r>
-              <a:rPr sz="2000" b="1">
+              <a:rPr sz="2000" b="1" dirty="0" err="1">
                 <a:solidFill>
                   <a:srgbClr val="E2E8F0"/>
                 </a:solidFill>
                 <a:latin typeface="Yu Gothic UI"/>
               </a:rPr>
-              <a:t>AI駆動開発の「実際のところ」を、開発者目線でリアルに共有する。</a:t>
+              <a:t>AI駆動開発</a:t>
+            </a:r>
+            <a:r>
+              <a:rPr sz="2000" b="1" dirty="0">
+                <a:solidFill>
+                  <a:srgbClr val="E2E8F0"/>
+                </a:solidFill>
+                <a:latin typeface="Yu Gothic UI"/>
+              </a:rPr>
+              <a:t> × Astro v6 </a:t>
+            </a:r>
+            <a:r>
+              <a:rPr sz="2000" b="1" dirty="0" err="1">
+                <a:solidFill>
+                  <a:srgbClr val="E2E8F0"/>
+                </a:solidFill>
+                <a:latin typeface="Yu Gothic UI"/>
+              </a:rPr>
+              <a:t>の実体験を、開発者目線でリアルに共有する</a:t>
+            </a:r>
+            <a:r>
+              <a:rPr sz="2000" b="1" dirty="0">
+                <a:solidFill>
+                  <a:srgbClr val="E2E8F0"/>
+                </a:solidFill>
+                <a:latin typeface="Yu Gothic UI"/>
+              </a:rPr>
+              <a:t>。</a:t>
             </a:r>
           </a:p>
           <a:p>
             <a:pPr algn="l"/>
-            <a:endParaRPr sz="2000" b="1">
+            <a:endParaRPr sz="2000" b="1" dirty="0">
               <a:solidFill>
                 <a:srgbClr val="E2E8F0"/>
               </a:solidFill>
@@ -6511,25 +6640,79 @@
           <a:p>
             <a:pPr algn="l"/>
             <a:r>
-              <a:rPr sz="1300" b="0">
+              <a:rPr sz="1300" b="0" dirty="0" err="1">
                 <a:solidFill>
                   <a:srgbClr val="94A3B8"/>
                 </a:solidFill>
                 <a:latin typeface="Yu Gothic UI"/>
               </a:rPr>
-              <a:t>AIはコストがかかる。だからこそ「使った人の感想」と「定量的な結果」を求められる。</a:t>
+              <a:t>AIサブスクにもコストはかかる。だから「使った人の数値」と「感想」が求められる</a:t>
+            </a:r>
+            <a:r>
+              <a:rPr sz="1300" b="0" dirty="0">
+                <a:solidFill>
+                  <a:srgbClr val="94A3B8"/>
+                </a:solidFill>
+                <a:latin typeface="Yu Gothic UI"/>
+              </a:rPr>
+              <a:t>。</a:t>
             </a:r>
           </a:p>
           <a:p>
             <a:pPr algn="l"/>
             <a:r>
-              <a:rPr sz="1300" b="0">
+              <a:rPr sz="1300" b="0" dirty="0" err="1">
                 <a:solidFill>
                   <a:srgbClr val="94A3B8"/>
                 </a:solidFill>
                 <a:latin typeface="Yu Gothic UI"/>
               </a:rPr>
-              <a:t>本LTでは、HomePage 開発を題材に、開発期間・コード量・コスト・品質を実数値で公開します。</a:t>
+              <a:t>HomePage</a:t>
+            </a:r>
+            <a:r>
+              <a:rPr sz="1300" b="0" dirty="0">
+                <a:solidFill>
+                  <a:srgbClr val="94A3B8"/>
+                </a:solidFill>
+                <a:latin typeface="Yu Gothic UI"/>
+              </a:rPr>
+              <a:t> </a:t>
+            </a:r>
+            <a:r>
+              <a:rPr sz="1300" b="0" dirty="0" err="1">
+                <a:solidFill>
+                  <a:srgbClr val="94A3B8"/>
+                </a:solidFill>
+                <a:latin typeface="Yu Gothic UI"/>
+              </a:rPr>
+              <a:t>開発を題材に、期間・コード量・コスト・Astro</a:t>
+            </a:r>
+            <a:r>
+              <a:rPr sz="1300" b="0" dirty="0">
+                <a:solidFill>
+                  <a:srgbClr val="94A3B8"/>
+                </a:solidFill>
+                <a:latin typeface="Yu Gothic UI"/>
+              </a:rPr>
+              <a:t> v6 </a:t>
+            </a:r>
+            <a:r>
+              <a:rPr sz="1300" b="0" dirty="0" err="1">
+                <a:solidFill>
+                  <a:srgbClr val="94A3B8"/>
+                </a:solidFill>
+                <a:latin typeface="Yu Gothic UI"/>
+              </a:rPr>
+              <a:t>のハマりどころを実データで共有</a:t>
+            </a:r>
+            <a:r>
+              <a:rPr sz="1300" b="0" dirty="0">
+                <a:solidFill>
+                  <a:srgbClr val="94A3B8"/>
+                </a:solidFill>
+                <a:latin typeface="Yu Gothic UI"/>
+              </a:rPr>
+              <a:t>。</a:t>
             </a:r>
           </a:p>
         </p:txBody>
@@ -6743,7 +6926,7 @@
                 </a:solidFill>
                 <a:latin typeface="Yu Gothic UI"/>
               </a:rPr>
-              <a:t>コスト感覚</a:t>
+              <a:t>Astro v6 の実情</a:t>
             </a:r>
           </a:p>
           <a:p>
@@ -6764,8 +6947,8 @@
                 </a:solidFill>
                 <a:latin typeface="Yu Gothic UI"/>
               </a:rPr>
-              <a:t>月$33（実質）。
-外注比 1/100〜1/300 の現実。</a:t>
+              <a:t>日本語記事がまだ少ない。
+ハマりどころと強みを共有。</a:t>
             </a:r>
           </a:p>
         </p:txBody>
@@ -6861,7 +7044,7 @@
                 </a:solidFill>
                 <a:latin typeface="Yu Gothic UI"/>
               </a:rPr>
-              <a:t>再現可能性</a:t>
+              <a:t>HomePage 誘導</a:t>
             </a:r>
           </a:p>
           <a:p>
@@ -6882,8 +7065,8 @@
                 </a:solidFill>
                 <a:latin typeface="Yu Gothic UI"/>
               </a:rPr>
-              <a:t>Claude Code Level 5 テンプレートを
-そのまま使えば誰でも到達できる。</a:t>
+              <a:t>完成品を直接見てもらうのが
+一番の説得材料。</a:t>
             </a:r>
           </a:p>
         </p:txBody>
@@ -6964,7 +7147,7 @@
             </a:pPr>
             <a:r>
               <a:rPr lang="ja-JP" altLang="en-US" sz="3600" dirty="0"/>
-              <a:t>HomePage の中身 — 技術スタック &amp; アーキテクチャ</a:t>
+              <a:t>Astro v6 の世界 — HomePage を支える技術スタック</a:t>
             </a:r>
             <a:endParaRPr sz="3600" dirty="0"/>
           </a:p>
@@ -7000,7 +7183,7 @@
                 </a:solidFill>
                 <a:latin typeface="Yu Gothic UI"/>
               </a:rPr>
-              <a:t>Astro v6 完全静的SSG + ゼロJSナビゲーション + ビルド時API連携</a:t>
+              <a:t>完全静的SSG + アイランド・アーキテクチャ + ゼロJS by default + ビルド時API連携</a:t>
             </a:r>
           </a:p>
         </p:txBody>
@@ -7225,7 +7408,7 @@
                 </a:solidFill>
                 <a:latin typeface="Yu Gothic UI"/>
               </a:rPr>
-              <a:t>Scoped CSS</a:t>
+              <a:t>Scoped + is:global CSS</a:t>
             </a:r>
           </a:p>
           <a:p>
@@ -7258,7 +7441,7 @@
                 </a:solidFill>
                 <a:latin typeface="Yu Gothic UI"/>
               </a:rPr>
-              <a:t>CSS Variables / scroll-behavior</a:t>
+              <a:t>CSS Variables / 動的DOM対応</a:t>
             </a:r>
           </a:p>
         </p:txBody>
@@ -7387,7 +7570,7 @@
                 </a:solidFill>
                 <a:latin typeface="Yu Gothic UI"/>
               </a:rPr>
-              <a:t>data-astro-reload で互換性確保</a:t>
+              <a:t>動的セグメント [lang]/[...slug]</a:t>
             </a:r>
           </a:p>
         </p:txBody>
@@ -7504,7 +7687,7 @@
                 </a:solidFill>
                 <a:latin typeface="Yu Gothic UI"/>
               </a:rPr>
-              <a:t>型安全 + 単体テスト</a:t>
+              <a:t>型安全 + 32件テスト</a:t>
             </a:r>
           </a:p>
           <a:p>
@@ -7645,7 +7828,7 @@
                 </a:solidFill>
                 <a:latin typeface="Yu Gothic UI"/>
               </a:rPr>
-              <a:t>毎月 Qiita 取得バッチ</a:t>
+              <a:t>日次 cron で予約投稿</a:t>
             </a:r>
           </a:p>
         </p:txBody>
@@ -7774,7 +7957,7 @@
                 </a:solidFill>
                 <a:latin typeface="Yu Gothic UI"/>
               </a:rPr>
-              <a:t>Formspree (Honeypot)</a:t>
+              <a:t>Formspree(Honeypot)</a:t>
             </a:r>
           </a:p>
           <a:p>
@@ -7882,7 +8065,7 @@
                 </a:solidFill>
                 <a:latin typeface="Yu Gothic UI"/>
               </a:rPr>
-              <a:t>● Zero Hardcoding   ── 全UIテキストは src/data/labels.ts に集約（375行）。i18n相当の関心事分離。</a:t>
+              <a:t>● No Hardcoding  ── UIテキストは全て i18n 辞書に集約。ja/en 両対応(Labels型でビルド時検証)。</a:t>
             </a:r>
           </a:p>
           <a:p>
@@ -7894,7 +8077,7 @@
                 </a:solidFill>
                 <a:latin typeface="Yu Gothic UI"/>
               </a:rPr>
-              <a:t>● Zero JS Navigation   ── 目次・アンカー・スムーズスクロールは scroll-behavior + scroll-margin-top のみで実現。</a:t>
+              <a:t>● Zero JS by default  ── 動的DOM には is:global CSS を使用し Scoped CSS の罠を回避。</a:t>
             </a:r>
           </a:p>
           <a:p>
@@ -7906,7 +8089,7 @@
                 </a:solidFill>
                 <a:latin typeface="Yu Gothic UI"/>
               </a:rPr>
-              <a:t>● SEO First   ── sitemap / OGP / JSON-LD / RSS をビルド時に自動生成。Cookie-free Analytics で軽量。</a:t>
+              <a:t>● SEO First  ── sitemap / hreflang / OGP / JSON-LD / RSS を全てビルド時に自動生成。</a:t>
             </a:r>
           </a:p>
         </p:txBody>
@@ -10782,7 +10965,7 @@
                 </a:solidFill>
                 <a:latin typeface="Yu Gothic UI"/>
               </a:rPr>
-              <a:t>🔑  Claude Code Max は1契約で複数プロジェクト共用可。AI駆動開発を始めるなら『3作目以降から劇的に元が取れる』</a:t>
+              <a:t>🔑  Claude Code Max は1契約で複数プロジェクト共用可。AI駆動開発は『3作目以降から劇的に元が取れる』</a:t>
             </a:r>
           </a:p>
           <a:p>
@@ -10794,7 +10977,7 @@
                 </a:solidFill>
                 <a:latin typeface="Yu Gothic UI"/>
               </a:rPr>
-              <a:t>ユメハシ・Defrago・HomePage で同じサブスクを使い回し、按分で実質月5,000円。テンプレート資産は使うほど蓄積される。</a:t>
+              <a:t>ユメハシ・Defrago・HomePage で同じサブスクを使い回し。Astro v6 のようなフレームワークも『テンプレート化』すれば学習コスト 0 に収束する。</a:t>
             </a:r>
           </a:p>
         </p:txBody>
@@ -10919,7 +11102,7 @@
                 </a:solidFill>
                 <a:latin typeface="Yu Gothic UI"/>
               </a:rPr>
-              <a:t>AIが「コード生成」を担うからこそ、開発者は本来の価値に集中できる</a:t>
+              <a:t>AI が「コード生成」を、フレームワークが「再発明回避」を担う。開発者は『何を作るか』に集中できる。</a:t>
             </a:r>
           </a:p>
         </p:txBody>
@@ -11577,7 +11760,7 @@
             </a:pPr>
             <a:r>
               <a:rPr lang="ja-JP" altLang="en-US" sz="3600" dirty="0"/>
-              <a:t>なぜこのホームページを作ったのか</a:t>
+              <a:t>HomePage を見てください — 今日話した全てが詰まっています</a:t>
             </a:r>
           </a:p>
         </p:txBody>
@@ -11590,7 +11773,7 @@
         </p:nvSpPr>
         <p:spPr>
           <a:xfrm>
-            <a:off x="795528" y="1097280"/>
+            <a:off x="795528" y="1632685"/>
             <a:ext cx="10588752" cy="1920240"/>
           </a:xfrm>
           <a:prstGeom prst="roundRect">
@@ -11639,8 +11822,8 @@
         </p:nvSpPr>
         <p:spPr>
           <a:xfrm>
-            <a:off x="1097280" y="1280160"/>
-            <a:ext cx="10058400" cy="1645920"/>
+            <a:off x="1097280" y="1815565"/>
+            <a:ext cx="10058400" cy="1261884"/>
           </a:xfrm>
           <a:prstGeom prst="rect">
             <a:avLst/>
@@ -11655,30 +11838,48 @@
           <a:p>
             <a:pPr algn="l"/>
             <a:r>
-              <a:rPr sz="1200" b="1">
+              <a:rPr sz="1200" b="1" dirty="0">
                 <a:solidFill>
                   <a:srgbClr val="A78BFA"/>
                 </a:solidFill>
                 <a:latin typeface="Yu Gothic UI"/>
               </a:rPr>
-              <a:t>WHY</a:t>
+              <a:t>SEE THE SITE</a:t>
             </a:r>
           </a:p>
           <a:p>
             <a:pPr algn="l"/>
             <a:r>
-              <a:rPr sz="2200" b="1">
+              <a:rPr sz="2200" b="1" dirty="0">
                 <a:solidFill>
                   <a:srgbClr val="E2E8F0"/>
                 </a:solidFill>
                 <a:latin typeface="Yu Gothic UI"/>
               </a:rPr>
-              <a:t>「自分をプロダクト化する場所が欲しかった。」</a:t>
+              <a:t>「</a:t>
+            </a:r>
+            <a:r>
+              <a:rPr sz="2200" b="1" dirty="0" err="1">
+                <a:solidFill>
+                  <a:srgbClr val="E2E8F0"/>
+                </a:solidFill>
+                <a:latin typeface="Yu Gothic UI"/>
+              </a:rPr>
+              <a:t>自分をプロダクト化する場所が欲しかった</a:t>
+            </a:r>
+            <a:r>
+              <a:rPr sz="2200" b="1" dirty="0">
+                <a:solidFill>
+                  <a:srgbClr val="E2E8F0"/>
+                </a:solidFill>
+                <a:latin typeface="Yu Gothic UI"/>
+              </a:rPr>
+              <a:t>。」</a:t>
             </a:r>
           </a:p>
           <a:p>
             <a:pPr algn="l"/>
-            <a:endParaRPr sz="2200" b="1">
+            <a:endParaRPr sz="2200" b="1" dirty="0">
               <a:solidFill>
                 <a:srgbClr val="E2E8F0"/>
               </a:solidFill>
@@ -11688,37 +11889,40 @@
           <a:p>
             <a:pPr algn="l"/>
             <a:r>
-              <a:rPr sz="1400" b="0">
+              <a:rPr sz="1400" b="0" dirty="0" err="1">
                 <a:solidFill>
                   <a:srgbClr val="94A3B8"/>
                 </a:solidFill>
                 <a:latin typeface="Yu Gothic UI"/>
               </a:rPr>
-              <a:t>SNS や Qiita だけでは開発者の全容は伝わらない。</a:t>
-            </a:r>
-          </a:p>
-          <a:p>
-            <a:pPr algn="l"/>
-            <a:r>
-              <a:rPr sz="1400" b="0">
+              <a:t>このLTで話した定量データも、Astro</a:t>
+            </a:r>
+            <a:r>
+              <a:rPr sz="1400" b="0" dirty="0">
                 <a:solidFill>
                   <a:srgbClr val="94A3B8"/>
                 </a:solidFill>
                 <a:latin typeface="Yu Gothic UI"/>
               </a:rPr>
-              <a:t>個人開発・参画プロジェクト・技術記事・経歴を一箇所に集約し、</a:t>
-            </a:r>
-          </a:p>
-          <a:p>
-            <a:pPr algn="l"/>
-            <a:r>
-              <a:rPr sz="1400" b="0">
+              <a:t> v6 </a:t>
+            </a:r>
+            <a:r>
+              <a:rPr sz="1400" b="0" dirty="0" err="1">
                 <a:solidFill>
                   <a:srgbClr val="94A3B8"/>
                 </a:solidFill>
                 <a:latin typeface="Yu Gothic UI"/>
               </a:rPr>
-              <a:t>「フルスタックで作れること」自体を成果物として見せたかった。</a:t>
+              <a:t>の実装例も、すべてサイト上で追体験できます</a:t>
+            </a:r>
+            <a:r>
+              <a:rPr sz="1400" b="0" dirty="0">
+                <a:solidFill>
+                  <a:srgbClr val="94A3B8"/>
+                </a:solidFill>
+                <a:latin typeface="Yu Gothic UI"/>
+              </a:rPr>
+              <a:t>。</a:t>
             </a:r>
           </a:p>
         </p:txBody>
@@ -11731,7 +11935,7 @@
         </p:nvSpPr>
         <p:spPr>
           <a:xfrm>
-            <a:off x="795528" y="3246120"/>
+            <a:off x="795528" y="3781525"/>
             <a:ext cx="3456432" cy="2468880"/>
           </a:xfrm>
           <a:prstGeom prst="roundRect">
@@ -11780,7 +11984,7 @@
         </p:nvSpPr>
         <p:spPr>
           <a:xfrm>
-            <a:off x="978408" y="3383280"/>
+            <a:off x="978408" y="3918685"/>
             <a:ext cx="3108960" cy="594360"/>
           </a:xfrm>
           <a:prstGeom prst="rect">
@@ -11815,7 +12019,7 @@
         </p:nvSpPr>
         <p:spPr>
           <a:xfrm>
-            <a:off x="978408" y="4023360"/>
+            <a:off x="978408" y="4558765"/>
             <a:ext cx="3108960" cy="1645920"/>
           </a:xfrm>
           <a:prstGeom prst="rect">
@@ -11874,7 +12078,7 @@
         </p:nvSpPr>
         <p:spPr>
           <a:xfrm>
-            <a:off x="4398264" y="3246120"/>
+            <a:off x="4398264" y="3781525"/>
             <a:ext cx="3456432" cy="2468880"/>
           </a:xfrm>
           <a:prstGeom prst="roundRect">
@@ -11923,7 +12127,7 @@
         </p:nvSpPr>
         <p:spPr>
           <a:xfrm>
-            <a:off x="4581144" y="3383280"/>
+            <a:off x="4581144" y="3918685"/>
             <a:ext cx="3108960" cy="594360"/>
           </a:xfrm>
           <a:prstGeom prst="rect">
@@ -11958,7 +12162,7 @@
         </p:nvSpPr>
         <p:spPr>
           <a:xfrm>
-            <a:off x="4581144" y="4023360"/>
+            <a:off x="4581144" y="4558765"/>
             <a:ext cx="3108960" cy="1645920"/>
           </a:xfrm>
           <a:prstGeom prst="rect">
@@ -11980,7 +12184,7 @@
                 </a:solidFill>
                 <a:latin typeface="Yu Gothic UI"/>
               </a:rPr>
-              <a:t>個人プロダクト・参画プロジェクトを</a:t>
+              <a:t>個人プロダクト3作 + 参画プロジェクトを</a:t>
             </a:r>
           </a:p>
           <a:p>
@@ -12017,7 +12221,7 @@
         </p:nvSpPr>
         <p:spPr>
           <a:xfrm>
-            <a:off x="8001000" y="3246120"/>
+            <a:off x="8001000" y="3781525"/>
             <a:ext cx="3456432" cy="2468880"/>
           </a:xfrm>
           <a:prstGeom prst="roundRect">
@@ -12066,7 +12270,7 @@
         </p:nvSpPr>
         <p:spPr>
           <a:xfrm>
-            <a:off x="8183879" y="3383280"/>
+            <a:off x="8183879" y="3918685"/>
             <a:ext cx="3108960" cy="594360"/>
           </a:xfrm>
           <a:prstGeom prst="rect">
@@ -12101,7 +12305,7 @@
         </p:nvSpPr>
         <p:spPr>
           <a:xfrm>
-            <a:off x="8183879" y="4023360"/>
+            <a:off x="8183879" y="4558765"/>
             <a:ext cx="3108960" cy="738664"/>
           </a:xfrm>
           <a:prstGeom prst="rect">
@@ -12123,82 +12327,19 @@
                 </a:solidFill>
                 <a:latin typeface="Yu Gothic UI"/>
               </a:rPr>
-              <a:t>Qiita</a:t>
-            </a:r>
-            <a:r>
-              <a:rPr sz="1200" b="0" dirty="0">
+              <a:t>毎日投稿(一日一投稿ルール)。</a:t>
+            </a:r>
+          </a:p>
+          <a:p>
+            <a:pPr algn="l"/>
+            <a:r>
+              <a:rPr lang="ja-JP" altLang="en-US" sz="1200" b="0" dirty="0">
                 <a:solidFill>
                   <a:srgbClr val="E2E8F0"/>
                 </a:solidFill>
                 <a:latin typeface="Yu Gothic UI"/>
               </a:rPr>
-              <a:t> </a:t>
-            </a:r>
-            <a:r>
-              <a:rPr sz="1200" b="0" dirty="0" err="1">
-                <a:solidFill>
-                  <a:srgbClr val="E2E8F0"/>
-                </a:solidFill>
-                <a:latin typeface="Yu Gothic UI"/>
-              </a:rPr>
-              <a:t>記事をビルド時に自動取得</a:t>
-            </a:r>
-            <a:r>
-              <a:rPr sz="1200" b="0" dirty="0">
-                <a:solidFill>
-                  <a:srgbClr val="E2E8F0"/>
-                </a:solidFill>
-                <a:latin typeface="Yu Gothic UI"/>
-              </a:rPr>
-              <a:t>。</a:t>
-            </a:r>
-          </a:p>
-          <a:p>
-            <a:pPr algn="l"/>
-            <a:r>
-              <a:rPr lang="ja-JP" altLang="en-US" sz="1200" b="0" dirty="0">
-                <a:solidFill>
-                  <a:srgbClr val="E2E8F0"/>
-                </a:solidFill>
-                <a:latin typeface="Yu Gothic UI"/>
-              </a:rPr>
-              <a:t>毎日の投稿予約機能等を用いることで</a:t>
-            </a:r>
-            <a:r>
-              <a:rPr lang="en-US" altLang="ja-JP" sz="1200" b="0" dirty="0">
-                <a:solidFill>
-                  <a:srgbClr val="E2E8F0"/>
-                </a:solidFill>
-                <a:latin typeface="Yu Gothic UI"/>
-              </a:rPr>
-              <a:t>1</a:t>
-            </a:r>
-            <a:r>
-              <a:rPr lang="ja-JP" altLang="en-US" sz="1200" b="0" dirty="0">
-                <a:solidFill>
-                  <a:srgbClr val="E2E8F0"/>
-                </a:solidFill>
-                <a:latin typeface="Yu Gothic UI"/>
-              </a:rPr>
-              <a:t>日</a:t>
-            </a:r>
-            <a:r>
-              <a:rPr lang="en-US" altLang="ja-JP" sz="1200" b="0" dirty="0">
-                <a:solidFill>
-                  <a:srgbClr val="E2E8F0"/>
-                </a:solidFill>
-                <a:latin typeface="Yu Gothic UI"/>
-              </a:rPr>
-              <a:t>1</a:t>
-            </a:r>
-            <a:r>
-              <a:rPr lang="ja-JP" altLang="en-US" sz="1200" b="0" dirty="0">
-                <a:solidFill>
-                  <a:srgbClr val="E2E8F0"/>
-                </a:solidFill>
-                <a:latin typeface="Yu Gothic UI"/>
-              </a:rPr>
-              <a:t>投稿を目指す。</a:t>
+              <a:t>Qiita 記事もビルド時に自動取得し表示。</a:t>
             </a:r>
             <a:endParaRPr sz="1200" b="0" dirty="0">
               <a:solidFill>

--- a/docs/PR/LT/HomePage_開発者用.pptx
+++ b/docs/PR/LT/HomePage_開発者用.pptx
@@ -217,7 +217,7 @@
           <a:p>
             <a:fld id="{B5390508-11FE-4107-B12B-FCBF7DE7140E}" type="datetimeFigureOut">
               <a:rPr kumimoji="1" lang="ja-JP" altLang="en-US" smtClean="0"/>
-              <a:t>2026/4/22</a:t>
+              <a:t>2026/4/24</a:t>
             </a:fld>
             <a:endParaRPr kumimoji="1" lang="ja-JP" altLang="en-US"/>
           </a:p>
@@ -2531,7 +2531,7 @@
           <a:p>
             <a:fld id="{5BCAD085-E8A6-8845-BD4E-CB4CCA059FC4}" type="datetimeFigureOut">
               <a:rPr lang="en-US" smtClean="0"/>
-              <a:t>4/22/2026</a:t>
+              <a:t>4/24/2026</a:t>
             </a:fld>
             <a:endParaRPr lang="en-US"/>
           </a:p>
@@ -2699,7 +2699,7 @@
           <a:p>
             <a:fld id="{5BCAD085-E8A6-8845-BD4E-CB4CCA059FC4}" type="datetimeFigureOut">
               <a:rPr lang="en-US" smtClean="0"/>
-              <a:t>4/22/2026</a:t>
+              <a:t>4/24/2026</a:t>
             </a:fld>
             <a:endParaRPr lang="en-US"/>
           </a:p>
@@ -2877,7 +2877,7 @@
           <a:p>
             <a:fld id="{5BCAD085-E8A6-8845-BD4E-CB4CCA059FC4}" type="datetimeFigureOut">
               <a:rPr lang="en-US" smtClean="0"/>
-              <a:t>4/22/2026</a:t>
+              <a:t>4/24/2026</a:t>
             </a:fld>
             <a:endParaRPr lang="en-US"/>
           </a:p>
@@ -3045,7 +3045,7 @@
           <a:p>
             <a:fld id="{5BCAD085-E8A6-8845-BD4E-CB4CCA059FC4}" type="datetimeFigureOut">
               <a:rPr lang="en-US" smtClean="0"/>
-              <a:t>4/22/2026</a:t>
+              <a:t>4/24/2026</a:t>
             </a:fld>
             <a:endParaRPr lang="en-US"/>
           </a:p>
@@ -3290,7 +3290,7 @@
           <a:p>
             <a:fld id="{5BCAD085-E8A6-8845-BD4E-CB4CCA059FC4}" type="datetimeFigureOut">
               <a:rPr lang="en-US" smtClean="0"/>
-              <a:t>4/22/2026</a:t>
+              <a:t>4/24/2026</a:t>
             </a:fld>
             <a:endParaRPr lang="en-US"/>
           </a:p>
@@ -3575,7 +3575,7 @@
           <a:p>
             <a:fld id="{5BCAD085-E8A6-8845-BD4E-CB4CCA059FC4}" type="datetimeFigureOut">
               <a:rPr lang="en-US" smtClean="0"/>
-              <a:t>4/22/2026</a:t>
+              <a:t>4/24/2026</a:t>
             </a:fld>
             <a:endParaRPr lang="en-US"/>
           </a:p>
@@ -3994,7 +3994,7 @@
           <a:p>
             <a:fld id="{5BCAD085-E8A6-8845-BD4E-CB4CCA059FC4}" type="datetimeFigureOut">
               <a:rPr lang="en-US" smtClean="0"/>
-              <a:t>4/22/2026</a:t>
+              <a:t>4/24/2026</a:t>
             </a:fld>
             <a:endParaRPr lang="en-US"/>
           </a:p>
@@ -4111,7 +4111,7 @@
           <a:p>
             <a:fld id="{5BCAD085-E8A6-8845-BD4E-CB4CCA059FC4}" type="datetimeFigureOut">
               <a:rPr lang="en-US" smtClean="0"/>
-              <a:t>4/22/2026</a:t>
+              <a:t>4/24/2026</a:t>
             </a:fld>
             <a:endParaRPr lang="en-US"/>
           </a:p>
@@ -4206,7 +4206,7 @@
           <a:p>
             <a:fld id="{5BCAD085-E8A6-8845-BD4E-CB4CCA059FC4}" type="datetimeFigureOut">
               <a:rPr lang="en-US" smtClean="0"/>
-              <a:t>4/22/2026</a:t>
+              <a:t>4/24/2026</a:t>
             </a:fld>
             <a:endParaRPr lang="en-US"/>
           </a:p>
@@ -4481,7 +4481,7 @@
           <a:p>
             <a:fld id="{5BCAD085-E8A6-8845-BD4E-CB4CCA059FC4}" type="datetimeFigureOut">
               <a:rPr lang="en-US" smtClean="0"/>
-              <a:t>4/22/2026</a:t>
+              <a:t>4/24/2026</a:t>
             </a:fld>
             <a:endParaRPr lang="en-US"/>
           </a:p>
@@ -4733,7 +4733,7 @@
           <a:p>
             <a:fld id="{5BCAD085-E8A6-8845-BD4E-CB4CCA059FC4}" type="datetimeFigureOut">
               <a:rPr lang="en-US" smtClean="0"/>
-              <a:t>4/22/2026</a:t>
+              <a:t>4/24/2026</a:t>
             </a:fld>
             <a:endParaRPr lang="en-US"/>
           </a:p>
@@ -4944,7 +4944,7 @@
           <a:p>
             <a:fld id="{5BCAD085-E8A6-8845-BD4E-CB4CCA059FC4}" type="datetimeFigureOut">
               <a:rPr lang="en-US" smtClean="0"/>
-              <a:t>4/22/2026</a:t>
+              <a:t>4/24/2026</a:t>
             </a:fld>
             <a:endParaRPr lang="en-US"/>
           </a:p>
@@ -5978,7 +5978,7 @@
         <p:spPr>
           <a:xfrm>
             <a:off x="6748272" y="1234440"/>
-            <a:ext cx="4663440" cy="4754880"/>
+            <a:ext cx="4663440" cy="3093154"/>
           </a:xfrm>
           <a:prstGeom prst="rect">
             <a:avLst/>
@@ -6032,52 +6032,25 @@
                 </a:solidFill>
                 <a:latin typeface="Yu Gothic UI"/>
               </a:rPr>
-              <a:t>① </a:t>
-            </a:r>
-            <a:r>
-              <a:rPr sz="1500" b="0" dirty="0" err="1">
+              <a:t>①</a:t>
+            </a:r>
+            <a:r>
+              <a:rPr lang="en-US" altLang="ja-JP" sz="1500" b="0" dirty="0">
                 <a:solidFill>
                   <a:srgbClr val="E2E8F0"/>
                 </a:solidFill>
                 <a:latin typeface="Yu Gothic UI"/>
               </a:rPr>
-              <a:t>AI駆動開発</a:t>
-            </a:r>
-            <a:r>
-              <a:rPr sz="1500" b="0" dirty="0">
+              <a:t>Astro v6 — </a:t>
+            </a:r>
+            <a:r>
+              <a:rPr lang="ja-JP" altLang="en-US" sz="1500" b="0" dirty="0">
                 <a:solidFill>
                   <a:srgbClr val="E2E8F0"/>
                 </a:solidFill>
                 <a:latin typeface="Yu Gothic UI"/>
               </a:rPr>
-              <a:t> vs </a:t>
-            </a:r>
-            <a:r>
-              <a:rPr sz="1500" b="0" dirty="0" err="1">
-                <a:solidFill>
-                  <a:srgbClr val="E2E8F0"/>
-                </a:solidFill>
-                <a:latin typeface="Yu Gothic UI"/>
-              </a:rPr>
-              <a:t>従来開発</a:t>
-            </a:r>
-            <a:r>
-              <a:rPr sz="1500" b="0" dirty="0">
-                <a:solidFill>
-                  <a:srgbClr val="E2E8F0"/>
-                </a:solidFill>
-                <a:latin typeface="Yu Gothic UI"/>
-              </a:rPr>
-              <a:t> </a:t>
-            </a:r>
-            <a:r>
-              <a:rPr sz="1500" b="0" dirty="0" err="1">
-                <a:solidFill>
-                  <a:srgbClr val="E2E8F0"/>
-                </a:solidFill>
-                <a:latin typeface="Yu Gothic UI"/>
-              </a:rPr>
-              <a:t>を「数字」で比較</a:t>
+              <a:t>日本ではまだ情報が少ないフレームワークの実情</a:t>
             </a:r>
             <a:endParaRPr sz="1500" b="0" dirty="0">
               <a:solidFill>
@@ -6087,7 +6060,6 @@
             </a:endParaRPr>
           </a:p>
           <a:p>
-            <a:pPr algn="l"/>
             <a:r>
               <a:rPr sz="1500" b="0" dirty="0">
                 <a:solidFill>
@@ -6095,16 +6067,52 @@
                 </a:solidFill>
                 <a:latin typeface="Yu Gothic UI"/>
               </a:rPr>
-              <a:t>② Astro v6 — </a:t>
-            </a:r>
-            <a:r>
-              <a:rPr sz="1500" b="0" dirty="0" err="1">
+              <a:t>②</a:t>
+            </a:r>
+            <a:r>
+              <a:rPr lang="ja-JP" altLang="en-US" sz="1500" dirty="0">
                 <a:solidFill>
                   <a:srgbClr val="E2E8F0"/>
                 </a:solidFill>
                 <a:latin typeface="Yu Gothic UI"/>
               </a:rPr>
-              <a:t>日本ではまだ情報が少ないフレームワークの実情</a:t>
+              <a:t> </a:t>
+            </a:r>
+            <a:r>
+              <a:rPr lang="en-US" altLang="ja-JP" sz="1500" dirty="0">
+                <a:solidFill>
+                  <a:srgbClr val="E2E8F0"/>
+                </a:solidFill>
+                <a:latin typeface="Yu Gothic UI"/>
+              </a:rPr>
+              <a:t>AI</a:t>
+            </a:r>
+            <a:r>
+              <a:rPr lang="ja-JP" altLang="en-US" sz="1500" dirty="0">
+                <a:solidFill>
+                  <a:srgbClr val="E2E8F0"/>
+                </a:solidFill>
+                <a:latin typeface="Yu Gothic UI"/>
+              </a:rPr>
+              <a:t>駆動開発 </a:t>
+            </a:r>
+            <a:r>
+              <a:rPr lang="en-US" altLang="ja-JP" sz="1500" dirty="0">
+                <a:solidFill>
+                  <a:srgbClr val="E2E8F0"/>
+                </a:solidFill>
+                <a:latin typeface="Yu Gothic UI"/>
+              </a:rPr>
+              <a:t>vs </a:t>
+            </a:r>
+            <a:r>
+              <a:rPr lang="ja-JP" altLang="en-US" sz="1500" dirty="0">
+                <a:solidFill>
+                  <a:srgbClr val="E2E8F0"/>
+                </a:solidFill>
+                <a:latin typeface="Yu Gothic UI"/>
+              </a:rPr>
+              <a:t>従来開発 を「数字」で比較</a:t>
             </a:r>
             <a:endParaRPr sz="1500" b="0" dirty="0">
               <a:solidFill>
